--- a/Hosanna (Praise is Rising).pptx
+++ b/Hosanna (Praise is Rising).pptx
@@ -7,15 +7,20 @@
   <p:sldIdLst>
     <p:sldId id="274" r:id="rId2"/>
     <p:sldId id="280" r:id="rId3"/>
-    <p:sldId id="281" r:id="rId4"/>
-    <p:sldId id="279" r:id="rId5"/>
-    <p:sldId id="282" r:id="rId6"/>
-    <p:sldId id="283" r:id="rId7"/>
-    <p:sldId id="284" r:id="rId8"/>
-    <p:sldId id="285" r:id="rId9"/>
-    <p:sldId id="286" r:id="rId10"/>
-    <p:sldId id="287" r:id="rId11"/>
-    <p:sldId id="288" r:id="rId12"/>
+    <p:sldId id="289" r:id="rId4"/>
+    <p:sldId id="281" r:id="rId5"/>
+    <p:sldId id="290" r:id="rId6"/>
+    <p:sldId id="279" r:id="rId7"/>
+    <p:sldId id="282" r:id="rId8"/>
+    <p:sldId id="291" r:id="rId9"/>
+    <p:sldId id="292" r:id="rId10"/>
+    <p:sldId id="293" r:id="rId11"/>
+    <p:sldId id="294" r:id="rId12"/>
+    <p:sldId id="285" r:id="rId13"/>
+    <p:sldId id="295" r:id="rId14"/>
+    <p:sldId id="296" r:id="rId15"/>
+    <p:sldId id="297" r:id="rId16"/>
+    <p:sldId id="298" r:id="rId17"/>
   </p:sldIdLst>
   <p:sldSz cx="9144000" cy="6858000" type="screen4x3"/>
   <p:notesSz cx="6858000" cy="9144000"/>
@@ -253,7 +258,7 @@
           <a:p>
             <a:fld id="{E759A0DE-F190-5444-87AC-4719D5F20D15}" type="datetimeFigureOut">
               <a:rPr lang="en-US" smtClean="0"/>
-              <a:t>7/11/26</a:t>
+              <a:t>7/14/26</a:t>
             </a:fld>
             <a:endParaRPr lang="en-US"/>
           </a:p>
@@ -423,7 +428,7 @@
           <a:p>
             <a:fld id="{E759A0DE-F190-5444-87AC-4719D5F20D15}" type="datetimeFigureOut">
               <a:rPr lang="en-US" smtClean="0"/>
-              <a:t>7/11/26</a:t>
+              <a:t>7/14/26</a:t>
             </a:fld>
             <a:endParaRPr lang="en-US"/>
           </a:p>
@@ -603,7 +608,7 @@
           <a:p>
             <a:fld id="{E759A0DE-F190-5444-87AC-4719D5F20D15}" type="datetimeFigureOut">
               <a:rPr lang="en-US" smtClean="0"/>
-              <a:t>7/11/26</a:t>
+              <a:t>7/14/26</a:t>
             </a:fld>
             <a:endParaRPr lang="en-US"/>
           </a:p>
@@ -773,7 +778,7 @@
           <a:p>
             <a:fld id="{E759A0DE-F190-5444-87AC-4719D5F20D15}" type="datetimeFigureOut">
               <a:rPr lang="en-US" smtClean="0"/>
-              <a:t>7/11/26</a:t>
+              <a:t>7/14/26</a:t>
             </a:fld>
             <a:endParaRPr lang="en-US"/>
           </a:p>
@@ -1019,7 +1024,7 @@
           <a:p>
             <a:fld id="{E759A0DE-F190-5444-87AC-4719D5F20D15}" type="datetimeFigureOut">
               <a:rPr lang="en-US" smtClean="0"/>
-              <a:t>7/11/26</a:t>
+              <a:t>7/14/26</a:t>
             </a:fld>
             <a:endParaRPr lang="en-US"/>
           </a:p>
@@ -1251,7 +1256,7 @@
           <a:p>
             <a:fld id="{E759A0DE-F190-5444-87AC-4719D5F20D15}" type="datetimeFigureOut">
               <a:rPr lang="en-US" smtClean="0"/>
-              <a:t>7/11/26</a:t>
+              <a:t>7/14/26</a:t>
             </a:fld>
             <a:endParaRPr lang="en-US"/>
           </a:p>
@@ -1618,7 +1623,7 @@
           <a:p>
             <a:fld id="{E759A0DE-F190-5444-87AC-4719D5F20D15}" type="datetimeFigureOut">
               <a:rPr lang="en-US" smtClean="0"/>
-              <a:t>7/11/26</a:t>
+              <a:t>7/14/26</a:t>
             </a:fld>
             <a:endParaRPr lang="en-US"/>
           </a:p>
@@ -1736,7 +1741,7 @@
           <a:p>
             <a:fld id="{E759A0DE-F190-5444-87AC-4719D5F20D15}" type="datetimeFigureOut">
               <a:rPr lang="en-US" smtClean="0"/>
-              <a:t>7/11/26</a:t>
+              <a:t>7/14/26</a:t>
             </a:fld>
             <a:endParaRPr lang="en-US"/>
           </a:p>
@@ -1831,7 +1836,7 @@
           <a:p>
             <a:fld id="{E759A0DE-F190-5444-87AC-4719D5F20D15}" type="datetimeFigureOut">
               <a:rPr lang="en-US" smtClean="0"/>
-              <a:t>7/11/26</a:t>
+              <a:t>7/14/26</a:t>
             </a:fld>
             <a:endParaRPr lang="en-US"/>
           </a:p>
@@ -2108,7 +2113,7 @@
           <a:p>
             <a:fld id="{E759A0DE-F190-5444-87AC-4719D5F20D15}" type="datetimeFigureOut">
               <a:rPr lang="en-US" smtClean="0"/>
-              <a:t>7/11/26</a:t>
+              <a:t>7/14/26</a:t>
             </a:fld>
             <a:endParaRPr lang="en-US"/>
           </a:p>
@@ -2365,7 +2370,7 @@
           <a:p>
             <a:fld id="{E759A0DE-F190-5444-87AC-4719D5F20D15}" type="datetimeFigureOut">
               <a:rPr lang="en-US" smtClean="0"/>
-              <a:t>7/11/26</a:t>
+              <a:t>7/14/26</a:t>
             </a:fld>
             <a:endParaRPr lang="en-US"/>
           </a:p>
@@ -2578,7 +2583,7 @@
           <a:p>
             <a:fld id="{E759A0DE-F190-5444-87AC-4719D5F20D15}" type="datetimeFigureOut">
               <a:rPr lang="en-US" smtClean="0"/>
-              <a:t>7/11/26</a:t>
+              <a:t>7/14/26</a:t>
             </a:fld>
             <a:endParaRPr lang="en-US"/>
           </a:p>
@@ -3034,18 +3039,11 @@
                 <a:latin typeface="Avenir Medium" panose="02000503020000020003" pitchFamily="2" charset="0"/>
                 <a:ea typeface="Bodoni Ornaments" pitchFamily="2" charset="0"/>
               </a:rPr>
-              <a:t>Hosanna (</a:t>
-            </a:r>
-            <a:r>
-              <a:rPr lang="en-US" sz="6600" dirty="0" err="1">
-                <a:solidFill>
-                  <a:schemeClr val="bg1"/>
-                </a:solidFill>
-                <a:latin typeface="Avenir Medium" panose="02000503020000020003" pitchFamily="2" charset="0"/>
-                <a:ea typeface="Bodoni Ornaments" pitchFamily="2" charset="0"/>
-              </a:rPr>
-              <a:t>Priase</a:t>
-            </a:r>
+              <a:t>Hosanna </a:t>
+            </a:r>
+          </a:p>
+          <a:p>
+            <a:pPr algn="l"/>
             <a:r>
               <a:rPr lang="en-US" sz="6600" dirty="0">
                 <a:solidFill>
@@ -3054,7 +3052,96 @@
                 <a:latin typeface="Avenir Medium" panose="02000503020000020003" pitchFamily="2" charset="0"/>
                 <a:ea typeface="Bodoni Ornaments" pitchFamily="2" charset="0"/>
               </a:rPr>
-              <a:t> is Rising)</a:t>
+              <a:t>(Praise is Rising)</a:t>
+            </a:r>
+          </a:p>
+        </p:txBody>
+      </p:sp>
+      <p:sp>
+        <p:nvSpPr>
+          <p:cNvPr id="2" name="TextBox 1">
+            <a:extLst>
+              <a:ext uri="{FF2B5EF4-FFF2-40B4-BE49-F238E27FC236}">
+                <a16:creationId xmlns:a16="http://schemas.microsoft.com/office/drawing/2014/main" id="{984CD98A-E3B6-81F1-62FD-FA5E7E43693F}"/>
+              </a:ext>
+            </a:extLst>
+          </p:cNvPr>
+          <p:cNvSpPr txBox="1"/>
+          <p:nvPr/>
+        </p:nvSpPr>
+        <p:spPr>
+          <a:xfrm>
+            <a:off x="168442" y="5444311"/>
+            <a:ext cx="8807115" cy="1200329"/>
+          </a:xfrm>
+          <a:prstGeom prst="rect">
+            <a:avLst/>
+          </a:prstGeom>
+          <a:noFill/>
+        </p:spPr>
+        <p:txBody>
+          <a:bodyPr wrap="square" rtlCol="0">
+            <a:spAutoFit/>
+          </a:bodyPr>
+          <a:lstStyle/>
+          <a:p>
+            <a:pPr algn="ctr"/>
+            <a:r>
+              <a:rPr lang="en-US" dirty="0">
+                <a:solidFill>
+                  <a:schemeClr val="bg1"/>
+                </a:solidFill>
+              </a:rPr>
+              <a:t>Authors(Brenton Brown, Paul Baloch)</a:t>
+            </a:r>
+          </a:p>
+          <a:p>
+            <a:pPr algn="ctr"/>
+            <a:r>
+              <a:rPr lang="en-US" dirty="0">
+                <a:solidFill>
+                  <a:schemeClr val="bg1"/>
+                </a:solidFill>
+              </a:rPr>
+              <a:t>© 2005, 2006 Thankyou Music Ltd; Integrity's Hosanna! Music; </a:t>
+            </a:r>
+            <a:r>
+              <a:rPr lang="en-US" dirty="0" err="1">
+                <a:solidFill>
+                  <a:schemeClr val="bg1"/>
+                </a:solidFill>
+              </a:rPr>
+              <a:t>Leadworship</a:t>
+            </a:r>
+            <a:r>
+              <a:rPr lang="en-US" dirty="0">
+                <a:solidFill>
+                  <a:schemeClr val="bg1"/>
+                </a:solidFill>
+              </a:rPr>
+              <a:t> Songs</a:t>
+            </a:r>
+          </a:p>
+          <a:p>
+            <a:pPr algn="ctr"/>
+            <a:r>
+              <a:rPr lang="en-US" dirty="0">
+                <a:solidFill>
+                  <a:schemeClr val="bg1"/>
+                </a:solidFill>
+              </a:rPr>
+              <a:t>Used By Permission</a:t>
+            </a:r>
+          </a:p>
+          <a:p>
+            <a:pPr algn="ctr"/>
+            <a:r>
+              <a:rPr lang="en-US" dirty="0">
+                <a:solidFill>
+                  <a:schemeClr val="bg1"/>
+                </a:solidFill>
+              </a:rPr>
+              <a:t>CCLI License #137776</a:t>
             </a:r>
           </a:p>
         </p:txBody>
@@ -3088,7 +3175,7 @@
         <p:cNvPr id="1" name="">
           <a:extLst>
             <a:ext uri="{FF2B5EF4-FFF2-40B4-BE49-F238E27FC236}">
-              <a16:creationId xmlns:a16="http://schemas.microsoft.com/office/drawing/2014/main" id="{3507794A-C9C9-9B11-998A-49C0D56D2AAF}"/>
+              <a16:creationId xmlns:a16="http://schemas.microsoft.com/office/drawing/2014/main" id="{B0B41B99-0DDC-4E64-A558-C52BDD5A3295}"/>
             </a:ext>
           </a:extLst>
         </p:cNvPr>
@@ -3108,7 +3195,7 @@
           <p:cNvPr id="3" name="Subtitle 2">
             <a:extLst>
               <a:ext uri="{FF2B5EF4-FFF2-40B4-BE49-F238E27FC236}">
-                <a16:creationId xmlns:a16="http://schemas.microsoft.com/office/drawing/2014/main" id="{63245251-37BB-CFC9-3AB0-AC9F8B532899}"/>
+                <a16:creationId xmlns:a16="http://schemas.microsoft.com/office/drawing/2014/main" id="{5E33B434-B4AF-BE5B-44BC-4E612B65A42E}"/>
               </a:ext>
             </a:extLst>
           </p:cNvPr>
@@ -3121,8 +3208,8 @@
         </p:nvSpPr>
         <p:spPr>
           <a:xfrm>
-            <a:off x="144379" y="228600"/>
-            <a:ext cx="8903369" cy="6431280"/>
+            <a:off x="84221" y="213360"/>
+            <a:ext cx="8891337" cy="6416040"/>
           </a:xfrm>
         </p:spPr>
         <p:txBody>
@@ -3131,7 +3218,7 @@
           </a:bodyPr>
           <a:lstStyle/>
           <a:p>
-            <a:endParaRPr lang="en-US" sz="4400" dirty="0">
+            <a:endParaRPr lang="en-US" sz="5400" b="1" dirty="0">
               <a:solidFill>
                 <a:schemeClr val="bg1"/>
               </a:solidFill>
@@ -3141,42 +3228,30 @@
           </a:p>
           <a:p>
             <a:r>
-              <a:rPr lang="en-US" sz="4400" dirty="0">
-                <a:solidFill>
-                  <a:schemeClr val="bg1"/>
-                </a:solidFill>
-                <a:latin typeface="Avenir Medium" panose="02000503020000020003" pitchFamily="2" charset="0"/>
-                <a:ea typeface="Bodoni Ornaments" pitchFamily="2" charset="0"/>
-              </a:rPr>
-              <a:t>Hosanna, hosanna </a:t>
-            </a:r>
-          </a:p>
-          <a:p>
-            <a:r>
-              <a:rPr lang="en-US" sz="4400" dirty="0">
-                <a:solidFill>
-                  <a:schemeClr val="bg1"/>
-                </a:solidFill>
-                <a:latin typeface="Avenir Medium" panose="02000503020000020003" pitchFamily="2" charset="0"/>
-                <a:ea typeface="Bodoni Ornaments" pitchFamily="2" charset="0"/>
-              </a:rPr>
-              <a:t>You are the God who saves us, </a:t>
-            </a:r>
-          </a:p>
-          <a:p>
-            <a:r>
-              <a:rPr lang="en-US" sz="4400" dirty="0">
-                <a:solidFill>
-                  <a:schemeClr val="bg1"/>
-                </a:solidFill>
-                <a:latin typeface="Avenir Medium" panose="02000503020000020003" pitchFamily="2" charset="0"/>
-                <a:ea typeface="Bodoni Ornaments" pitchFamily="2" charset="0"/>
-              </a:rPr>
-              <a:t>worthy of all our praises</a:t>
-            </a:r>
-          </a:p>
-          <a:p>
-            <a:endParaRPr lang="en-US" sz="4400" dirty="0">
+              <a:rPr lang="en-US" sz="5400" b="1" dirty="0">
+                <a:solidFill>
+                  <a:schemeClr val="bg1"/>
+                </a:solidFill>
+                <a:latin typeface="Avenir Medium" panose="02000503020000020003" pitchFamily="2" charset="0"/>
+                <a:ea typeface="Bodoni Ornaments" pitchFamily="2" charset="0"/>
+              </a:rPr>
+              <a:t>And in Your presence </a:t>
+            </a:r>
+          </a:p>
+          <a:p>
+            <a:r>
+              <a:rPr lang="en-US" sz="5400" b="1" dirty="0">
+                <a:solidFill>
+                  <a:schemeClr val="bg1"/>
+                </a:solidFill>
+                <a:latin typeface="Avenir Medium" panose="02000503020000020003" pitchFamily="2" charset="0"/>
+                <a:ea typeface="Bodoni Ornaments" pitchFamily="2" charset="0"/>
+              </a:rPr>
+              <a:t>All our fears are washed away</a:t>
+            </a:r>
+          </a:p>
+          <a:p>
+            <a:endParaRPr lang="en-US" sz="5400" b="1" dirty="0">
               <a:solidFill>
                 <a:schemeClr val="bg1"/>
               </a:solidFill>
@@ -3184,12 +3259,33 @@
               <a:ea typeface="Bodoni Ornaments" pitchFamily="2" charset="0"/>
             </a:endParaRPr>
           </a:p>
+          <a:p>
+            <a:r>
+              <a:rPr lang="en-US" sz="5400" b="1" dirty="0">
+                <a:solidFill>
+                  <a:schemeClr val="bg1"/>
+                </a:solidFill>
+                <a:latin typeface="Avenir Medium" panose="02000503020000020003" pitchFamily="2" charset="0"/>
+                <a:ea typeface="Bodoni Ornaments" pitchFamily="2" charset="0"/>
+              </a:rPr>
+              <a:t>washed  away</a:t>
+            </a:r>
+          </a:p>
+          <a:p>
+            <a:endParaRPr lang="en-US" sz="5400" b="1" dirty="0">
+              <a:solidFill>
+                <a:schemeClr val="bg1"/>
+              </a:solidFill>
+              <a:latin typeface="Avenir Medium" panose="02000503020000020003" pitchFamily="2" charset="0"/>
+              <a:ea typeface="Bodoni Ornaments" pitchFamily="2" charset="0"/>
+            </a:endParaRPr>
+          </a:p>
         </p:txBody>
       </p:sp>
     </p:spTree>
     <p:extLst>
       <p:ext uri="{BB962C8B-B14F-4D97-AF65-F5344CB8AC3E}">
-        <p14:creationId xmlns:p14="http://schemas.microsoft.com/office/powerpoint/2010/main" val="3148293588"/>
+        <p14:creationId xmlns:p14="http://schemas.microsoft.com/office/powerpoint/2010/main" val="2518486842"/>
       </p:ext>
     </p:extLst>
   </p:cSld>
@@ -3215,7 +3311,7 @@
         <p:cNvPr id="1" name="">
           <a:extLst>
             <a:ext uri="{FF2B5EF4-FFF2-40B4-BE49-F238E27FC236}">
-              <a16:creationId xmlns:a16="http://schemas.microsoft.com/office/drawing/2014/main" id="{BD3532E1-D17D-9F0C-B938-31E31F77FBE4}"/>
+              <a16:creationId xmlns:a16="http://schemas.microsoft.com/office/drawing/2014/main" id="{F2075F7E-A24A-ACA0-2681-5D4B6A8D6CB4}"/>
             </a:ext>
           </a:extLst>
         </p:cNvPr>
@@ -3235,7 +3331,7 @@
           <p:cNvPr id="3" name="Subtitle 2">
             <a:extLst>
               <a:ext uri="{FF2B5EF4-FFF2-40B4-BE49-F238E27FC236}">
-                <a16:creationId xmlns:a16="http://schemas.microsoft.com/office/drawing/2014/main" id="{53810DAA-321A-C99A-A48C-1D35EDD2A97F}"/>
+                <a16:creationId xmlns:a16="http://schemas.microsoft.com/office/drawing/2014/main" id="{44082A1D-402E-79F3-2C7A-D16B92525421}"/>
               </a:ext>
             </a:extLst>
           </p:cNvPr>
@@ -3258,7 +3354,7 @@
           </a:bodyPr>
           <a:lstStyle/>
           <a:p>
-            <a:endParaRPr lang="en-US" sz="4400" dirty="0">
+            <a:endParaRPr lang="en-US" sz="5400" b="1" dirty="0">
               <a:solidFill>
                 <a:schemeClr val="bg1"/>
               </a:solidFill>
@@ -3268,7 +3364,7 @@
           </a:p>
           <a:p>
             <a:r>
-              <a:rPr lang="en-US" sz="4400" dirty="0">
+              <a:rPr lang="en-US" sz="5400" b="1" dirty="0">
                 <a:solidFill>
                   <a:schemeClr val="bg1"/>
                 </a:solidFill>
@@ -3280,30 +3376,42 @@
           </a:p>
           <a:p>
             <a:r>
-              <a:rPr lang="en-US" sz="4400" dirty="0">
-                <a:solidFill>
-                  <a:schemeClr val="bg1"/>
-                </a:solidFill>
-                <a:latin typeface="Avenir Medium" panose="02000503020000020003" pitchFamily="2" charset="0"/>
-                <a:ea typeface="Bodoni Ornaments" pitchFamily="2" charset="0"/>
-              </a:rPr>
-              <a:t>Come have Your way among us</a:t>
-            </a:r>
-          </a:p>
-          <a:p>
-            <a:r>
-              <a:rPr lang="en-US" sz="4400" dirty="0">
-                <a:solidFill>
-                  <a:schemeClr val="bg1"/>
-                </a:solidFill>
-                <a:latin typeface="Avenir Medium" panose="02000503020000020003" pitchFamily="2" charset="0"/>
-                <a:ea typeface="Bodoni Ornaments" pitchFamily="2" charset="0"/>
-              </a:rPr>
-              <a:t>We welcome You here Lord Jesus</a:t>
-            </a:r>
-          </a:p>
-          <a:p>
-            <a:endParaRPr lang="en-US" sz="4400" dirty="0">
+              <a:rPr lang="en-US" sz="5400" b="1" dirty="0">
+                <a:solidFill>
+                  <a:schemeClr val="bg1"/>
+                </a:solidFill>
+                <a:latin typeface="Avenir Medium" panose="02000503020000020003" pitchFamily="2" charset="0"/>
+                <a:ea typeface="Bodoni Ornaments" pitchFamily="2" charset="0"/>
+              </a:rPr>
+              <a:t>You are the God </a:t>
+            </a:r>
+          </a:p>
+          <a:p>
+            <a:r>
+              <a:rPr lang="en-US" sz="5400" b="1" dirty="0">
+                <a:solidFill>
+                  <a:schemeClr val="bg1"/>
+                </a:solidFill>
+                <a:latin typeface="Avenir Medium" panose="02000503020000020003" pitchFamily="2" charset="0"/>
+                <a:ea typeface="Bodoni Ornaments" pitchFamily="2" charset="0"/>
+              </a:rPr>
+              <a:t>who saves us, </a:t>
+            </a:r>
+          </a:p>
+          <a:p>
+            <a:r>
+              <a:rPr lang="en-US" sz="5400" b="1" dirty="0">
+                <a:solidFill>
+                  <a:schemeClr val="bg1"/>
+                </a:solidFill>
+                <a:latin typeface="Avenir Medium" panose="02000503020000020003" pitchFamily="2" charset="0"/>
+                <a:ea typeface="Bodoni Ornaments" pitchFamily="2" charset="0"/>
+              </a:rPr>
+              <a:t>worthy of all our praises</a:t>
+            </a:r>
+          </a:p>
+          <a:p>
+            <a:endParaRPr lang="en-US" sz="5400" b="1" dirty="0">
               <a:solidFill>
                 <a:schemeClr val="bg1"/>
               </a:solidFill>
@@ -3316,7 +3424,730 @@
     </p:spTree>
     <p:extLst>
       <p:ext uri="{BB962C8B-B14F-4D97-AF65-F5344CB8AC3E}">
-        <p14:creationId xmlns:p14="http://schemas.microsoft.com/office/powerpoint/2010/main" val="1078738018"/>
+        <p14:creationId xmlns:p14="http://schemas.microsoft.com/office/powerpoint/2010/main" val="2171712721"/>
+      </p:ext>
+    </p:extLst>
+  </p:cSld>
+  <p:clrMapOvr>
+    <a:masterClrMapping/>
+  </p:clrMapOvr>
+</p:sld>
+</file>
+
+<file path=ppt/slides/slide12.xml><?xml version="1.0" encoding="utf-8"?>
+<p:sld xmlns:a="http://schemas.openxmlformats.org/drawingml/2006/main" xmlns:r="http://schemas.openxmlformats.org/officeDocument/2006/relationships" xmlns:p="http://schemas.openxmlformats.org/presentationml/2006/main">
+  <p:cSld>
+    <p:bg>
+      <p:bgPr>
+        <a:solidFill>
+          <a:schemeClr val="tx1"/>
+        </a:solidFill>
+        <a:effectLst/>
+      </p:bgPr>
+    </p:bg>
+    <p:spTree>
+      <p:nvGrpSpPr>
+        <p:cNvPr id="1" name="">
+          <a:extLst>
+            <a:ext uri="{FF2B5EF4-FFF2-40B4-BE49-F238E27FC236}">
+              <a16:creationId xmlns:a16="http://schemas.microsoft.com/office/drawing/2014/main" id="{B6BA87F3-30A5-3C5A-BA70-70E1CE69C9F4}"/>
+            </a:ext>
+          </a:extLst>
+        </p:cNvPr>
+        <p:cNvGrpSpPr/>
+        <p:nvPr/>
+      </p:nvGrpSpPr>
+      <p:grpSpPr>
+        <a:xfrm>
+          <a:off x="0" y="0"/>
+          <a:ext cx="0" cy="0"/>
+          <a:chOff x="0" y="0"/>
+          <a:chExt cx="0" cy="0"/>
+        </a:xfrm>
+      </p:grpSpPr>
+      <p:sp>
+        <p:nvSpPr>
+          <p:cNvPr id="3" name="Subtitle 2">
+            <a:extLst>
+              <a:ext uri="{FF2B5EF4-FFF2-40B4-BE49-F238E27FC236}">
+                <a16:creationId xmlns:a16="http://schemas.microsoft.com/office/drawing/2014/main" id="{7BED1C2F-387A-D854-55D9-02E9DC03BA98}"/>
+              </a:ext>
+            </a:extLst>
+          </p:cNvPr>
+          <p:cNvSpPr>
+            <a:spLocks noGrp="1"/>
+          </p:cNvSpPr>
+          <p:nvPr>
+            <p:ph type="subTitle" idx="1"/>
+          </p:nvPr>
+        </p:nvSpPr>
+        <p:spPr>
+          <a:xfrm>
+            <a:off x="144379" y="228600"/>
+            <a:ext cx="8903369" cy="6431280"/>
+          </a:xfrm>
+        </p:spPr>
+        <p:txBody>
+          <a:bodyPr>
+            <a:noAutofit/>
+          </a:bodyPr>
+          <a:lstStyle/>
+          <a:p>
+            <a:endParaRPr lang="en-US" sz="5400" b="1" dirty="0">
+              <a:solidFill>
+                <a:schemeClr val="bg1"/>
+              </a:solidFill>
+              <a:latin typeface="Avenir Medium" panose="02000503020000020003" pitchFamily="2" charset="0"/>
+              <a:ea typeface="Bodoni Ornaments" pitchFamily="2" charset="0"/>
+            </a:endParaRPr>
+          </a:p>
+          <a:p>
+            <a:r>
+              <a:rPr lang="en-US" sz="5400" b="1" dirty="0">
+                <a:solidFill>
+                  <a:schemeClr val="bg1"/>
+                </a:solidFill>
+                <a:latin typeface="Avenir Medium" panose="02000503020000020003" pitchFamily="2" charset="0"/>
+                <a:ea typeface="Bodoni Ornaments" pitchFamily="2" charset="0"/>
+              </a:rPr>
+              <a:t>Hosanna, hosanna </a:t>
+            </a:r>
+          </a:p>
+          <a:p>
+            <a:r>
+              <a:rPr lang="en-US" sz="5400" b="1" dirty="0">
+                <a:solidFill>
+                  <a:schemeClr val="bg1"/>
+                </a:solidFill>
+                <a:latin typeface="Avenir Medium" panose="02000503020000020003" pitchFamily="2" charset="0"/>
+                <a:ea typeface="Bodoni Ornaments" pitchFamily="2" charset="0"/>
+              </a:rPr>
+              <a:t>Come have Your way </a:t>
+            </a:r>
+          </a:p>
+          <a:p>
+            <a:r>
+              <a:rPr lang="en-US" sz="5400" b="1" dirty="0">
+                <a:solidFill>
+                  <a:schemeClr val="bg1"/>
+                </a:solidFill>
+                <a:latin typeface="Avenir Medium" panose="02000503020000020003" pitchFamily="2" charset="0"/>
+                <a:ea typeface="Bodoni Ornaments" pitchFamily="2" charset="0"/>
+              </a:rPr>
+              <a:t>among us</a:t>
+            </a:r>
+          </a:p>
+          <a:p>
+            <a:r>
+              <a:rPr lang="en-US" sz="5400" b="1" dirty="0">
+                <a:solidFill>
+                  <a:schemeClr val="bg1"/>
+                </a:solidFill>
+                <a:latin typeface="Avenir Medium" panose="02000503020000020003" pitchFamily="2" charset="0"/>
+                <a:ea typeface="Bodoni Ornaments" pitchFamily="2" charset="0"/>
+              </a:rPr>
+              <a:t>We welcome You here </a:t>
+            </a:r>
+          </a:p>
+          <a:p>
+            <a:r>
+              <a:rPr lang="en-US" sz="5400" b="1" dirty="0">
+                <a:solidFill>
+                  <a:schemeClr val="bg1"/>
+                </a:solidFill>
+                <a:latin typeface="Avenir Medium" panose="02000503020000020003" pitchFamily="2" charset="0"/>
+                <a:ea typeface="Bodoni Ornaments" pitchFamily="2" charset="0"/>
+              </a:rPr>
+              <a:t>Lord Jesus</a:t>
+            </a:r>
+          </a:p>
+          <a:p>
+            <a:endParaRPr lang="en-US" sz="5400" b="1" dirty="0">
+              <a:solidFill>
+                <a:schemeClr val="bg1"/>
+              </a:solidFill>
+              <a:latin typeface="Avenir Medium" panose="02000503020000020003" pitchFamily="2" charset="0"/>
+              <a:ea typeface="Bodoni Ornaments" pitchFamily="2" charset="0"/>
+            </a:endParaRPr>
+          </a:p>
+        </p:txBody>
+      </p:sp>
+    </p:spTree>
+    <p:extLst>
+      <p:ext uri="{BB962C8B-B14F-4D97-AF65-F5344CB8AC3E}">
+        <p14:creationId xmlns:p14="http://schemas.microsoft.com/office/powerpoint/2010/main" val="1727555208"/>
+      </p:ext>
+    </p:extLst>
+  </p:cSld>
+  <p:clrMapOvr>
+    <a:masterClrMapping/>
+  </p:clrMapOvr>
+</p:sld>
+</file>
+
+<file path=ppt/slides/slide13.xml><?xml version="1.0" encoding="utf-8"?>
+<p:sld xmlns:a="http://schemas.openxmlformats.org/drawingml/2006/main" xmlns:r="http://schemas.openxmlformats.org/officeDocument/2006/relationships" xmlns:p="http://schemas.openxmlformats.org/presentationml/2006/main">
+  <p:cSld>
+    <p:bg>
+      <p:bgPr>
+        <a:solidFill>
+          <a:schemeClr val="tx1"/>
+        </a:solidFill>
+        <a:effectLst/>
+      </p:bgPr>
+    </p:bg>
+    <p:spTree>
+      <p:nvGrpSpPr>
+        <p:cNvPr id="1" name="">
+          <a:extLst>
+            <a:ext uri="{FF2B5EF4-FFF2-40B4-BE49-F238E27FC236}">
+              <a16:creationId xmlns:a16="http://schemas.microsoft.com/office/drawing/2014/main" id="{9E7A3DA7-1648-8817-47B0-4261A38D543F}"/>
+            </a:ext>
+          </a:extLst>
+        </p:cNvPr>
+        <p:cNvGrpSpPr/>
+        <p:nvPr/>
+      </p:nvGrpSpPr>
+      <p:grpSpPr>
+        <a:xfrm>
+          <a:off x="0" y="0"/>
+          <a:ext cx="0" cy="0"/>
+          <a:chOff x="0" y="0"/>
+          <a:chExt cx="0" cy="0"/>
+        </a:xfrm>
+      </p:grpSpPr>
+      <p:sp>
+        <p:nvSpPr>
+          <p:cNvPr id="3" name="Subtitle 2">
+            <a:extLst>
+              <a:ext uri="{FF2B5EF4-FFF2-40B4-BE49-F238E27FC236}">
+                <a16:creationId xmlns:a16="http://schemas.microsoft.com/office/drawing/2014/main" id="{E47737B6-A2A4-3873-61B1-06ABFB01F408}"/>
+              </a:ext>
+            </a:extLst>
+          </p:cNvPr>
+          <p:cNvSpPr>
+            <a:spLocks noGrp="1"/>
+          </p:cNvSpPr>
+          <p:nvPr>
+            <p:ph type="subTitle" idx="1"/>
+          </p:nvPr>
+        </p:nvSpPr>
+        <p:spPr>
+          <a:xfrm>
+            <a:off x="84221" y="213360"/>
+            <a:ext cx="8891337" cy="6416040"/>
+          </a:xfrm>
+        </p:spPr>
+        <p:txBody>
+          <a:bodyPr>
+            <a:noAutofit/>
+          </a:bodyPr>
+          <a:lstStyle/>
+          <a:p>
+            <a:endParaRPr lang="en-US" sz="5400" b="1" dirty="0">
+              <a:solidFill>
+                <a:schemeClr val="bg1"/>
+              </a:solidFill>
+              <a:latin typeface="Avenir Medium" panose="02000503020000020003" pitchFamily="2" charset="0"/>
+              <a:ea typeface="Bodoni Ornaments" pitchFamily="2" charset="0"/>
+            </a:endParaRPr>
+          </a:p>
+          <a:p>
+            <a:r>
+              <a:rPr lang="en-US" sz="5400" b="1" dirty="0" err="1">
+                <a:solidFill>
+                  <a:schemeClr val="bg1"/>
+                </a:solidFill>
+                <a:latin typeface="Avenir Medium" panose="02000503020000020003" pitchFamily="2" charset="0"/>
+                <a:ea typeface="Bodoni Ornaments" pitchFamily="2" charset="0"/>
+              </a:rPr>
+              <a:t>'Cause</a:t>
+            </a:r>
+            <a:r>
+              <a:rPr lang="en-US" sz="5400" b="1" dirty="0">
+                <a:solidFill>
+                  <a:schemeClr val="bg1"/>
+                </a:solidFill>
+                <a:latin typeface="Avenir Medium" panose="02000503020000020003" pitchFamily="2" charset="0"/>
+                <a:ea typeface="Bodoni Ornaments" pitchFamily="2" charset="0"/>
+              </a:rPr>
+              <a:t> when we see You</a:t>
+            </a:r>
+          </a:p>
+          <a:p>
+            <a:r>
+              <a:rPr lang="en-US" sz="5400" b="1" dirty="0">
+                <a:solidFill>
+                  <a:schemeClr val="bg1"/>
+                </a:solidFill>
+                <a:latin typeface="Avenir Medium" panose="02000503020000020003" pitchFamily="2" charset="0"/>
+                <a:ea typeface="Bodoni Ornaments" pitchFamily="2" charset="0"/>
+              </a:rPr>
+              <a:t>We find strength </a:t>
+            </a:r>
+          </a:p>
+          <a:p>
+            <a:r>
+              <a:rPr lang="en-US" sz="5400" b="1" dirty="0">
+                <a:solidFill>
+                  <a:schemeClr val="bg1"/>
+                </a:solidFill>
+                <a:latin typeface="Avenir Medium" panose="02000503020000020003" pitchFamily="2" charset="0"/>
+                <a:ea typeface="Bodoni Ornaments" pitchFamily="2" charset="0"/>
+              </a:rPr>
+              <a:t>to face the day</a:t>
+            </a:r>
+          </a:p>
+          <a:p>
+            <a:endParaRPr lang="en-US" sz="5400" b="1" dirty="0">
+              <a:solidFill>
+                <a:schemeClr val="bg1"/>
+              </a:solidFill>
+              <a:latin typeface="Avenir Medium" panose="02000503020000020003" pitchFamily="2" charset="0"/>
+              <a:ea typeface="Bodoni Ornaments" pitchFamily="2" charset="0"/>
+            </a:endParaRPr>
+          </a:p>
+          <a:p>
+            <a:endParaRPr lang="en-US" sz="5400" b="1" dirty="0">
+              <a:solidFill>
+                <a:schemeClr val="bg1"/>
+              </a:solidFill>
+              <a:latin typeface="Avenir Medium" panose="02000503020000020003" pitchFamily="2" charset="0"/>
+              <a:ea typeface="Bodoni Ornaments" pitchFamily="2" charset="0"/>
+            </a:endParaRPr>
+          </a:p>
+        </p:txBody>
+      </p:sp>
+    </p:spTree>
+    <p:extLst>
+      <p:ext uri="{BB962C8B-B14F-4D97-AF65-F5344CB8AC3E}">
+        <p14:creationId xmlns:p14="http://schemas.microsoft.com/office/powerpoint/2010/main" val="2924789617"/>
+      </p:ext>
+    </p:extLst>
+  </p:cSld>
+  <p:clrMapOvr>
+    <a:masterClrMapping/>
+  </p:clrMapOvr>
+</p:sld>
+</file>
+
+<file path=ppt/slides/slide14.xml><?xml version="1.0" encoding="utf-8"?>
+<p:sld xmlns:a="http://schemas.openxmlformats.org/drawingml/2006/main" xmlns:r="http://schemas.openxmlformats.org/officeDocument/2006/relationships" xmlns:p="http://schemas.openxmlformats.org/presentationml/2006/main">
+  <p:cSld>
+    <p:bg>
+      <p:bgPr>
+        <a:solidFill>
+          <a:schemeClr val="tx1"/>
+        </a:solidFill>
+        <a:effectLst/>
+      </p:bgPr>
+    </p:bg>
+    <p:spTree>
+      <p:nvGrpSpPr>
+        <p:cNvPr id="1" name="">
+          <a:extLst>
+            <a:ext uri="{FF2B5EF4-FFF2-40B4-BE49-F238E27FC236}">
+              <a16:creationId xmlns:a16="http://schemas.microsoft.com/office/drawing/2014/main" id="{EC58F19B-66A9-5E2B-4A69-BF383AC7C078}"/>
+            </a:ext>
+          </a:extLst>
+        </p:cNvPr>
+        <p:cNvGrpSpPr/>
+        <p:nvPr/>
+      </p:nvGrpSpPr>
+      <p:grpSpPr>
+        <a:xfrm>
+          <a:off x="0" y="0"/>
+          <a:ext cx="0" cy="0"/>
+          <a:chOff x="0" y="0"/>
+          <a:chExt cx="0" cy="0"/>
+        </a:xfrm>
+      </p:grpSpPr>
+      <p:sp>
+        <p:nvSpPr>
+          <p:cNvPr id="3" name="Subtitle 2">
+            <a:extLst>
+              <a:ext uri="{FF2B5EF4-FFF2-40B4-BE49-F238E27FC236}">
+                <a16:creationId xmlns:a16="http://schemas.microsoft.com/office/drawing/2014/main" id="{7F5C878E-F51A-E4A0-7174-22BE6C0024CC}"/>
+              </a:ext>
+            </a:extLst>
+          </p:cNvPr>
+          <p:cNvSpPr>
+            <a:spLocks noGrp="1"/>
+          </p:cNvSpPr>
+          <p:nvPr>
+            <p:ph type="subTitle" idx="1"/>
+          </p:nvPr>
+        </p:nvSpPr>
+        <p:spPr>
+          <a:xfrm>
+            <a:off x="84221" y="213360"/>
+            <a:ext cx="8891337" cy="6416040"/>
+          </a:xfrm>
+        </p:spPr>
+        <p:txBody>
+          <a:bodyPr>
+            <a:noAutofit/>
+          </a:bodyPr>
+          <a:lstStyle/>
+          <a:p>
+            <a:endParaRPr lang="en-US" sz="5400" b="1" dirty="0">
+              <a:solidFill>
+                <a:schemeClr val="bg1"/>
+              </a:solidFill>
+              <a:latin typeface="Avenir Medium" panose="02000503020000020003" pitchFamily="2" charset="0"/>
+              <a:ea typeface="Bodoni Ornaments" pitchFamily="2" charset="0"/>
+            </a:endParaRPr>
+          </a:p>
+          <a:p>
+            <a:r>
+              <a:rPr lang="en-US" sz="5400" b="1" dirty="0">
+                <a:solidFill>
+                  <a:schemeClr val="bg1"/>
+                </a:solidFill>
+                <a:latin typeface="Avenir Medium" panose="02000503020000020003" pitchFamily="2" charset="0"/>
+                <a:ea typeface="Bodoni Ornaments" pitchFamily="2" charset="0"/>
+              </a:rPr>
+              <a:t>And in Your presence </a:t>
+            </a:r>
+          </a:p>
+          <a:p>
+            <a:r>
+              <a:rPr lang="en-US" sz="5400" b="1" dirty="0">
+                <a:solidFill>
+                  <a:schemeClr val="bg1"/>
+                </a:solidFill>
+                <a:latin typeface="Avenir Medium" panose="02000503020000020003" pitchFamily="2" charset="0"/>
+                <a:ea typeface="Bodoni Ornaments" pitchFamily="2" charset="0"/>
+              </a:rPr>
+              <a:t>All our fears are washed away</a:t>
+            </a:r>
+          </a:p>
+          <a:p>
+            <a:endParaRPr lang="en-US" sz="5400" b="1" dirty="0">
+              <a:solidFill>
+                <a:schemeClr val="bg1"/>
+              </a:solidFill>
+              <a:latin typeface="Avenir Medium" panose="02000503020000020003" pitchFamily="2" charset="0"/>
+              <a:ea typeface="Bodoni Ornaments" pitchFamily="2" charset="0"/>
+            </a:endParaRPr>
+          </a:p>
+          <a:p>
+            <a:r>
+              <a:rPr lang="en-US" sz="5400" b="1" dirty="0">
+                <a:solidFill>
+                  <a:schemeClr val="bg1"/>
+                </a:solidFill>
+                <a:latin typeface="Avenir Medium" panose="02000503020000020003" pitchFamily="2" charset="0"/>
+                <a:ea typeface="Bodoni Ornaments" pitchFamily="2" charset="0"/>
+              </a:rPr>
+              <a:t>washed  away</a:t>
+            </a:r>
+          </a:p>
+          <a:p>
+            <a:endParaRPr lang="en-US" sz="5400" b="1" dirty="0">
+              <a:solidFill>
+                <a:schemeClr val="bg1"/>
+              </a:solidFill>
+              <a:latin typeface="Avenir Medium" panose="02000503020000020003" pitchFamily="2" charset="0"/>
+              <a:ea typeface="Bodoni Ornaments" pitchFamily="2" charset="0"/>
+            </a:endParaRPr>
+          </a:p>
+        </p:txBody>
+      </p:sp>
+    </p:spTree>
+    <p:extLst>
+      <p:ext uri="{BB962C8B-B14F-4D97-AF65-F5344CB8AC3E}">
+        <p14:creationId xmlns:p14="http://schemas.microsoft.com/office/powerpoint/2010/main" val="1707446818"/>
+      </p:ext>
+    </p:extLst>
+  </p:cSld>
+  <p:clrMapOvr>
+    <a:masterClrMapping/>
+  </p:clrMapOvr>
+</p:sld>
+</file>
+
+<file path=ppt/slides/slide15.xml><?xml version="1.0" encoding="utf-8"?>
+<p:sld xmlns:a="http://schemas.openxmlformats.org/drawingml/2006/main" xmlns:r="http://schemas.openxmlformats.org/officeDocument/2006/relationships" xmlns:p="http://schemas.openxmlformats.org/presentationml/2006/main">
+  <p:cSld>
+    <p:bg>
+      <p:bgPr>
+        <a:solidFill>
+          <a:schemeClr val="tx1"/>
+        </a:solidFill>
+        <a:effectLst/>
+      </p:bgPr>
+    </p:bg>
+    <p:spTree>
+      <p:nvGrpSpPr>
+        <p:cNvPr id="1" name="">
+          <a:extLst>
+            <a:ext uri="{FF2B5EF4-FFF2-40B4-BE49-F238E27FC236}">
+              <a16:creationId xmlns:a16="http://schemas.microsoft.com/office/drawing/2014/main" id="{125BD63A-823B-0D34-7FB9-2E3D11E7A879}"/>
+            </a:ext>
+          </a:extLst>
+        </p:cNvPr>
+        <p:cNvGrpSpPr/>
+        <p:nvPr/>
+      </p:nvGrpSpPr>
+      <p:grpSpPr>
+        <a:xfrm>
+          <a:off x="0" y="0"/>
+          <a:ext cx="0" cy="0"/>
+          <a:chOff x="0" y="0"/>
+          <a:chExt cx="0" cy="0"/>
+        </a:xfrm>
+      </p:grpSpPr>
+      <p:sp>
+        <p:nvSpPr>
+          <p:cNvPr id="3" name="Subtitle 2">
+            <a:extLst>
+              <a:ext uri="{FF2B5EF4-FFF2-40B4-BE49-F238E27FC236}">
+                <a16:creationId xmlns:a16="http://schemas.microsoft.com/office/drawing/2014/main" id="{C5A74D5E-AE57-77DB-D5EE-C9D27476E026}"/>
+              </a:ext>
+            </a:extLst>
+          </p:cNvPr>
+          <p:cNvSpPr>
+            <a:spLocks noGrp="1"/>
+          </p:cNvSpPr>
+          <p:nvPr>
+            <p:ph type="subTitle" idx="1"/>
+          </p:nvPr>
+        </p:nvSpPr>
+        <p:spPr>
+          <a:xfrm>
+            <a:off x="144379" y="228600"/>
+            <a:ext cx="8903369" cy="6431280"/>
+          </a:xfrm>
+        </p:spPr>
+        <p:txBody>
+          <a:bodyPr>
+            <a:noAutofit/>
+          </a:bodyPr>
+          <a:lstStyle/>
+          <a:p>
+            <a:endParaRPr lang="en-US" sz="5400" b="1" dirty="0">
+              <a:solidFill>
+                <a:schemeClr val="bg1"/>
+              </a:solidFill>
+              <a:latin typeface="Avenir Medium" panose="02000503020000020003" pitchFamily="2" charset="0"/>
+              <a:ea typeface="Bodoni Ornaments" pitchFamily="2" charset="0"/>
+            </a:endParaRPr>
+          </a:p>
+          <a:p>
+            <a:r>
+              <a:rPr lang="en-US" sz="5400" b="1" dirty="0">
+                <a:solidFill>
+                  <a:schemeClr val="bg1"/>
+                </a:solidFill>
+                <a:latin typeface="Avenir Medium" panose="02000503020000020003" pitchFamily="2" charset="0"/>
+                <a:ea typeface="Bodoni Ornaments" pitchFamily="2" charset="0"/>
+              </a:rPr>
+              <a:t>Hosanna, hosanna </a:t>
+            </a:r>
+          </a:p>
+          <a:p>
+            <a:r>
+              <a:rPr lang="en-US" sz="5400" b="1" dirty="0">
+                <a:solidFill>
+                  <a:schemeClr val="bg1"/>
+                </a:solidFill>
+                <a:latin typeface="Avenir Medium" panose="02000503020000020003" pitchFamily="2" charset="0"/>
+                <a:ea typeface="Bodoni Ornaments" pitchFamily="2" charset="0"/>
+              </a:rPr>
+              <a:t>You are the God </a:t>
+            </a:r>
+          </a:p>
+          <a:p>
+            <a:r>
+              <a:rPr lang="en-US" sz="5400" b="1" dirty="0">
+                <a:solidFill>
+                  <a:schemeClr val="bg1"/>
+                </a:solidFill>
+                <a:latin typeface="Avenir Medium" panose="02000503020000020003" pitchFamily="2" charset="0"/>
+                <a:ea typeface="Bodoni Ornaments" pitchFamily="2" charset="0"/>
+              </a:rPr>
+              <a:t>who saves us, </a:t>
+            </a:r>
+          </a:p>
+          <a:p>
+            <a:r>
+              <a:rPr lang="en-US" sz="5400" b="1" dirty="0">
+                <a:solidFill>
+                  <a:schemeClr val="bg1"/>
+                </a:solidFill>
+                <a:latin typeface="Avenir Medium" panose="02000503020000020003" pitchFamily="2" charset="0"/>
+                <a:ea typeface="Bodoni Ornaments" pitchFamily="2" charset="0"/>
+              </a:rPr>
+              <a:t>worthy of all our praises</a:t>
+            </a:r>
+          </a:p>
+          <a:p>
+            <a:endParaRPr lang="en-US" sz="5400" b="1" dirty="0">
+              <a:solidFill>
+                <a:schemeClr val="bg1"/>
+              </a:solidFill>
+              <a:latin typeface="Avenir Medium" panose="02000503020000020003" pitchFamily="2" charset="0"/>
+              <a:ea typeface="Bodoni Ornaments" pitchFamily="2" charset="0"/>
+            </a:endParaRPr>
+          </a:p>
+        </p:txBody>
+      </p:sp>
+    </p:spTree>
+    <p:extLst>
+      <p:ext uri="{BB962C8B-B14F-4D97-AF65-F5344CB8AC3E}">
+        <p14:creationId xmlns:p14="http://schemas.microsoft.com/office/powerpoint/2010/main" val="190553173"/>
+      </p:ext>
+    </p:extLst>
+  </p:cSld>
+  <p:clrMapOvr>
+    <a:masterClrMapping/>
+  </p:clrMapOvr>
+</p:sld>
+</file>
+
+<file path=ppt/slides/slide16.xml><?xml version="1.0" encoding="utf-8"?>
+<p:sld xmlns:a="http://schemas.openxmlformats.org/drawingml/2006/main" xmlns:r="http://schemas.openxmlformats.org/officeDocument/2006/relationships" xmlns:p="http://schemas.openxmlformats.org/presentationml/2006/main">
+  <p:cSld>
+    <p:bg>
+      <p:bgPr>
+        <a:solidFill>
+          <a:schemeClr val="tx1"/>
+        </a:solidFill>
+        <a:effectLst/>
+      </p:bgPr>
+    </p:bg>
+    <p:spTree>
+      <p:nvGrpSpPr>
+        <p:cNvPr id="1" name="">
+          <a:extLst>
+            <a:ext uri="{FF2B5EF4-FFF2-40B4-BE49-F238E27FC236}">
+              <a16:creationId xmlns:a16="http://schemas.microsoft.com/office/drawing/2014/main" id="{76F4EE5E-113B-B298-1CB5-A95D1FA9308D}"/>
+            </a:ext>
+          </a:extLst>
+        </p:cNvPr>
+        <p:cNvGrpSpPr/>
+        <p:nvPr/>
+      </p:nvGrpSpPr>
+      <p:grpSpPr>
+        <a:xfrm>
+          <a:off x="0" y="0"/>
+          <a:ext cx="0" cy="0"/>
+          <a:chOff x="0" y="0"/>
+          <a:chExt cx="0" cy="0"/>
+        </a:xfrm>
+      </p:grpSpPr>
+      <p:sp>
+        <p:nvSpPr>
+          <p:cNvPr id="3" name="Subtitle 2">
+            <a:extLst>
+              <a:ext uri="{FF2B5EF4-FFF2-40B4-BE49-F238E27FC236}">
+                <a16:creationId xmlns:a16="http://schemas.microsoft.com/office/drawing/2014/main" id="{796C3612-2797-38DA-41A9-CD2DFA6970A1}"/>
+              </a:ext>
+            </a:extLst>
+          </p:cNvPr>
+          <p:cNvSpPr>
+            <a:spLocks noGrp="1"/>
+          </p:cNvSpPr>
+          <p:nvPr>
+            <p:ph type="subTitle" idx="1"/>
+          </p:nvPr>
+        </p:nvSpPr>
+        <p:spPr>
+          <a:xfrm>
+            <a:off x="144379" y="228600"/>
+            <a:ext cx="8903369" cy="6431280"/>
+          </a:xfrm>
+        </p:spPr>
+        <p:txBody>
+          <a:bodyPr>
+            <a:noAutofit/>
+          </a:bodyPr>
+          <a:lstStyle/>
+          <a:p>
+            <a:endParaRPr lang="en-US" sz="5400" b="1" dirty="0">
+              <a:solidFill>
+                <a:schemeClr val="bg1"/>
+              </a:solidFill>
+              <a:latin typeface="Avenir Medium" panose="02000503020000020003" pitchFamily="2" charset="0"/>
+              <a:ea typeface="Bodoni Ornaments" pitchFamily="2" charset="0"/>
+            </a:endParaRPr>
+          </a:p>
+          <a:p>
+            <a:r>
+              <a:rPr lang="en-US" sz="5400" b="1" dirty="0">
+                <a:solidFill>
+                  <a:schemeClr val="bg1"/>
+                </a:solidFill>
+                <a:latin typeface="Avenir Medium" panose="02000503020000020003" pitchFamily="2" charset="0"/>
+                <a:ea typeface="Bodoni Ornaments" pitchFamily="2" charset="0"/>
+              </a:rPr>
+              <a:t>Hosanna, hosanna </a:t>
+            </a:r>
+          </a:p>
+          <a:p>
+            <a:r>
+              <a:rPr lang="en-US" sz="5400" b="1" dirty="0">
+                <a:solidFill>
+                  <a:schemeClr val="bg1"/>
+                </a:solidFill>
+                <a:latin typeface="Avenir Medium" panose="02000503020000020003" pitchFamily="2" charset="0"/>
+                <a:ea typeface="Bodoni Ornaments" pitchFamily="2" charset="0"/>
+              </a:rPr>
+              <a:t>Come have Your way </a:t>
+            </a:r>
+          </a:p>
+          <a:p>
+            <a:r>
+              <a:rPr lang="en-US" sz="5400" b="1" dirty="0">
+                <a:solidFill>
+                  <a:schemeClr val="bg1"/>
+                </a:solidFill>
+                <a:latin typeface="Avenir Medium" panose="02000503020000020003" pitchFamily="2" charset="0"/>
+                <a:ea typeface="Bodoni Ornaments" pitchFamily="2" charset="0"/>
+              </a:rPr>
+              <a:t>among us</a:t>
+            </a:r>
+          </a:p>
+          <a:p>
+            <a:r>
+              <a:rPr lang="en-US" sz="5400" b="1" dirty="0">
+                <a:solidFill>
+                  <a:schemeClr val="bg1"/>
+                </a:solidFill>
+                <a:latin typeface="Avenir Medium" panose="02000503020000020003" pitchFamily="2" charset="0"/>
+                <a:ea typeface="Bodoni Ornaments" pitchFamily="2" charset="0"/>
+              </a:rPr>
+              <a:t>We welcome You here </a:t>
+            </a:r>
+          </a:p>
+          <a:p>
+            <a:r>
+              <a:rPr lang="en-US" sz="5400" b="1" dirty="0">
+                <a:solidFill>
+                  <a:schemeClr val="bg1"/>
+                </a:solidFill>
+                <a:latin typeface="Avenir Medium" panose="02000503020000020003" pitchFamily="2" charset="0"/>
+                <a:ea typeface="Bodoni Ornaments" pitchFamily="2" charset="0"/>
+              </a:rPr>
+              <a:t>Lord Jesus</a:t>
+            </a:r>
+          </a:p>
+          <a:p>
+            <a:endParaRPr lang="en-US" sz="5400" b="1" dirty="0">
+              <a:solidFill>
+                <a:schemeClr val="bg1"/>
+              </a:solidFill>
+              <a:latin typeface="Avenir Medium" panose="02000503020000020003" pitchFamily="2" charset="0"/>
+              <a:ea typeface="Bodoni Ornaments" pitchFamily="2" charset="0"/>
+            </a:endParaRPr>
+          </a:p>
+        </p:txBody>
+      </p:sp>
+    </p:spTree>
+    <p:extLst>
+      <p:ext uri="{BB962C8B-B14F-4D97-AF65-F5344CB8AC3E}">
+        <p14:creationId xmlns:p14="http://schemas.microsoft.com/office/powerpoint/2010/main" val="1096791167"/>
       </p:ext>
     </p:extLst>
   </p:cSld>
@@ -3385,7 +4216,7 @@
           </a:bodyPr>
           <a:lstStyle/>
           <a:p>
-            <a:endParaRPr lang="en-US" sz="4400" dirty="0">
+            <a:endParaRPr lang="en-US" sz="5400" b="1" dirty="0">
               <a:solidFill>
                 <a:schemeClr val="bg1"/>
               </a:solidFill>
@@ -3395,7 +4226,7 @@
           </a:p>
           <a:p>
             <a:r>
-              <a:rPr lang="en-US" sz="4400" dirty="0">
+              <a:rPr lang="en-US" sz="5400" b="1" dirty="0">
                 <a:solidFill>
                   <a:schemeClr val="bg1"/>
                 </a:solidFill>
@@ -3407,7 +4238,7 @@
           </a:p>
           <a:p>
             <a:r>
-              <a:rPr lang="en-US" sz="4400" dirty="0">
+              <a:rPr lang="en-US" sz="5400" b="1" dirty="0">
                 <a:solidFill>
                   <a:schemeClr val="bg1"/>
                 </a:solidFill>
@@ -3418,8 +4249,17 @@
             </a:r>
           </a:p>
           <a:p>
-            <a:r>
-              <a:rPr lang="en-US" sz="4400" dirty="0">
+            <a:br>
+              <a:rPr lang="en-US" sz="5400" b="1" dirty="0">
+                <a:solidFill>
+                  <a:schemeClr val="bg1"/>
+                </a:solidFill>
+                <a:latin typeface="Avenir Medium" panose="02000503020000020003" pitchFamily="2" charset="0"/>
+                <a:ea typeface="Bodoni Ornaments" pitchFamily="2" charset="0"/>
+              </a:rPr>
+            </a:br>
+            <a:r>
+              <a:rPr lang="en-US" sz="5400" b="1" dirty="0">
                 <a:solidFill>
                   <a:schemeClr val="bg1"/>
                 </a:solidFill>
@@ -3430,7 +4270,7 @@
             </a:r>
           </a:p>
           <a:p>
-            <a:endParaRPr lang="en-US" sz="4400" dirty="0">
+            <a:endParaRPr lang="en-US" sz="5400" b="1" dirty="0">
               <a:solidFill>
                 <a:schemeClr val="bg1"/>
               </a:solidFill>
@@ -3439,43 +4279,7 @@
             </a:endParaRPr>
           </a:p>
           <a:p>
-            <a:r>
-              <a:rPr lang="en-US" sz="4400" dirty="0">
-                <a:solidFill>
-                  <a:schemeClr val="bg1"/>
-                </a:solidFill>
-                <a:latin typeface="Avenir Medium" panose="02000503020000020003" pitchFamily="2" charset="0"/>
-                <a:ea typeface="Bodoni Ornaments" pitchFamily="2" charset="0"/>
-              </a:rPr>
-              <a:t>Hope is stirring, </a:t>
-            </a:r>
-          </a:p>
-          <a:p>
-            <a:r>
-              <a:rPr lang="en-US" sz="4400" dirty="0">
-                <a:solidFill>
-                  <a:schemeClr val="bg1"/>
-                </a:solidFill>
-                <a:latin typeface="Avenir Medium" panose="02000503020000020003" pitchFamily="2" charset="0"/>
-                <a:ea typeface="Bodoni Ornaments" pitchFamily="2" charset="0"/>
-              </a:rPr>
-              <a:t>hearts are yearning for You</a:t>
-            </a:r>
-          </a:p>
-          <a:p>
-            <a:r>
-              <a:rPr lang="en-US" sz="4400" dirty="0">
-                <a:solidFill>
-                  <a:schemeClr val="bg1"/>
-                </a:solidFill>
-                <a:latin typeface="Avenir Medium" panose="02000503020000020003" pitchFamily="2" charset="0"/>
-                <a:ea typeface="Bodoni Ornaments" pitchFamily="2" charset="0"/>
-              </a:rPr>
-              <a:t>We long for You</a:t>
-            </a:r>
-          </a:p>
-          <a:p>
-            <a:endParaRPr lang="en-US" sz="4400" dirty="0">
+            <a:endParaRPr lang="en-US" sz="5400" b="1" dirty="0">
               <a:solidFill>
                 <a:schemeClr val="bg1"/>
               </a:solidFill>
@@ -3499,6 +4303,154 @@
 </file>
 
 <file path=ppt/slides/slide3.xml><?xml version="1.0" encoding="utf-8"?>
+<p:sld xmlns:a="http://schemas.openxmlformats.org/drawingml/2006/main" xmlns:r="http://schemas.openxmlformats.org/officeDocument/2006/relationships" xmlns:p="http://schemas.openxmlformats.org/presentationml/2006/main">
+  <p:cSld>
+    <p:bg>
+      <p:bgPr>
+        <a:solidFill>
+          <a:schemeClr val="tx1"/>
+        </a:solidFill>
+        <a:effectLst/>
+      </p:bgPr>
+    </p:bg>
+    <p:spTree>
+      <p:nvGrpSpPr>
+        <p:cNvPr id="1" name="">
+          <a:extLst>
+            <a:ext uri="{FF2B5EF4-FFF2-40B4-BE49-F238E27FC236}">
+              <a16:creationId xmlns:a16="http://schemas.microsoft.com/office/drawing/2014/main" id="{86EC9001-F50E-F88A-6862-3CE499008C9B}"/>
+            </a:ext>
+          </a:extLst>
+        </p:cNvPr>
+        <p:cNvGrpSpPr/>
+        <p:nvPr/>
+      </p:nvGrpSpPr>
+      <p:grpSpPr>
+        <a:xfrm>
+          <a:off x="0" y="0"/>
+          <a:ext cx="0" cy="0"/>
+          <a:chOff x="0" y="0"/>
+          <a:chExt cx="0" cy="0"/>
+        </a:xfrm>
+      </p:grpSpPr>
+      <p:sp>
+        <p:nvSpPr>
+          <p:cNvPr id="3" name="Subtitle 2">
+            <a:extLst>
+              <a:ext uri="{FF2B5EF4-FFF2-40B4-BE49-F238E27FC236}">
+                <a16:creationId xmlns:a16="http://schemas.microsoft.com/office/drawing/2014/main" id="{65CE0E62-FB08-40D6-CBEF-FAD3641C5B88}"/>
+              </a:ext>
+            </a:extLst>
+          </p:cNvPr>
+          <p:cNvSpPr>
+            <a:spLocks noGrp="1"/>
+          </p:cNvSpPr>
+          <p:nvPr>
+            <p:ph type="subTitle" idx="1"/>
+          </p:nvPr>
+        </p:nvSpPr>
+        <p:spPr>
+          <a:xfrm>
+            <a:off x="84221" y="213360"/>
+            <a:ext cx="8891337" cy="6416040"/>
+          </a:xfrm>
+        </p:spPr>
+        <p:txBody>
+          <a:bodyPr>
+            <a:noAutofit/>
+          </a:bodyPr>
+          <a:lstStyle/>
+          <a:p>
+            <a:endParaRPr lang="en-US" sz="5400" b="1" dirty="0">
+              <a:solidFill>
+                <a:schemeClr val="bg1"/>
+              </a:solidFill>
+              <a:latin typeface="Avenir Medium" panose="02000503020000020003" pitchFamily="2" charset="0"/>
+              <a:ea typeface="Bodoni Ornaments" pitchFamily="2" charset="0"/>
+            </a:endParaRPr>
+          </a:p>
+          <a:p>
+            <a:r>
+              <a:rPr lang="en-US" sz="5400" b="1" dirty="0">
+                <a:solidFill>
+                  <a:schemeClr val="bg1"/>
+                </a:solidFill>
+                <a:latin typeface="Avenir Medium" panose="02000503020000020003" pitchFamily="2" charset="0"/>
+                <a:ea typeface="Bodoni Ornaments" pitchFamily="2" charset="0"/>
+              </a:rPr>
+              <a:t>Hope is stirring, </a:t>
+            </a:r>
+          </a:p>
+          <a:p>
+            <a:r>
+              <a:rPr lang="en-US" sz="5400" b="1" dirty="0">
+                <a:solidFill>
+                  <a:schemeClr val="bg1"/>
+                </a:solidFill>
+                <a:latin typeface="Avenir Medium" panose="02000503020000020003" pitchFamily="2" charset="0"/>
+                <a:ea typeface="Bodoni Ornaments" pitchFamily="2" charset="0"/>
+              </a:rPr>
+              <a:t>hearts are yearning </a:t>
+            </a:r>
+          </a:p>
+          <a:p>
+            <a:r>
+              <a:rPr lang="en-US" sz="5400" b="1" dirty="0">
+                <a:solidFill>
+                  <a:schemeClr val="bg1"/>
+                </a:solidFill>
+                <a:latin typeface="Avenir Medium" panose="02000503020000020003" pitchFamily="2" charset="0"/>
+                <a:ea typeface="Bodoni Ornaments" pitchFamily="2" charset="0"/>
+              </a:rPr>
+              <a:t>for You</a:t>
+            </a:r>
+          </a:p>
+          <a:p>
+            <a:endParaRPr lang="en-US" sz="5400" b="1" dirty="0">
+              <a:solidFill>
+                <a:schemeClr val="bg1"/>
+              </a:solidFill>
+              <a:latin typeface="Avenir Medium" panose="02000503020000020003" pitchFamily="2" charset="0"/>
+              <a:ea typeface="Bodoni Ornaments" pitchFamily="2" charset="0"/>
+            </a:endParaRPr>
+          </a:p>
+          <a:p>
+            <a:r>
+              <a:rPr lang="en-US" sz="5400" b="1" dirty="0">
+                <a:solidFill>
+                  <a:schemeClr val="bg1"/>
+                </a:solidFill>
+                <a:latin typeface="Avenir Medium" panose="02000503020000020003" pitchFamily="2" charset="0"/>
+                <a:ea typeface="Bodoni Ornaments" pitchFamily="2" charset="0"/>
+              </a:rPr>
+              <a:t>We long for You</a:t>
+            </a:r>
+          </a:p>
+          <a:p>
+            <a:endParaRPr lang="en-US" sz="5400" b="1" dirty="0">
+              <a:solidFill>
+                <a:schemeClr val="bg1"/>
+              </a:solidFill>
+              <a:latin typeface="Avenir Medium" panose="02000503020000020003" pitchFamily="2" charset="0"/>
+              <a:ea typeface="Bodoni Ornaments" pitchFamily="2" charset="0"/>
+            </a:endParaRPr>
+          </a:p>
+        </p:txBody>
+      </p:sp>
+    </p:spTree>
+    <p:extLst>
+      <p:ext uri="{BB962C8B-B14F-4D97-AF65-F5344CB8AC3E}">
+        <p14:creationId xmlns:p14="http://schemas.microsoft.com/office/powerpoint/2010/main" val="3669347393"/>
+      </p:ext>
+    </p:extLst>
+  </p:cSld>
+  <p:clrMapOvr>
+    <a:masterClrMapping/>
+  </p:clrMapOvr>
+</p:sld>
+</file>
+
+<file path=ppt/slides/slide4.xml><?xml version="1.0" encoding="utf-8"?>
 <p:sld xmlns:a="http://schemas.openxmlformats.org/drawingml/2006/main" xmlns:r="http://schemas.openxmlformats.org/officeDocument/2006/relationships" xmlns:p="http://schemas.openxmlformats.org/presentationml/2006/main">
   <p:cSld>
     <p:bg>
@@ -3557,7 +4509,7 @@
           </a:bodyPr>
           <a:lstStyle/>
           <a:p>
-            <a:endParaRPr lang="en-US" sz="4400" dirty="0">
+            <a:endParaRPr lang="en-US" sz="5400" b="1" dirty="0">
               <a:solidFill>
                 <a:schemeClr val="bg1"/>
               </a:solidFill>
@@ -3567,7 +4519,7 @@
           </a:p>
           <a:p>
             <a:r>
-              <a:rPr lang="en-US" sz="4400" dirty="0" err="1">
+              <a:rPr lang="en-US" sz="5400" b="1" dirty="0" err="1">
                 <a:solidFill>
                   <a:schemeClr val="bg1"/>
                 </a:solidFill>
@@ -3577,7 +4529,7 @@
               <a:t>'Cause</a:t>
             </a:r>
             <a:r>
-              <a:rPr lang="en-US" sz="4400" dirty="0">
+              <a:rPr lang="en-US" sz="5400" b="1" dirty="0">
                 <a:solidFill>
                   <a:schemeClr val="bg1"/>
                 </a:solidFill>
@@ -3589,18 +4541,30 @@
           </a:p>
           <a:p>
             <a:r>
-              <a:rPr lang="en-US" sz="4400" dirty="0">
-                <a:solidFill>
-                  <a:schemeClr val="bg1"/>
-                </a:solidFill>
-                <a:latin typeface="Avenir Medium" panose="02000503020000020003" pitchFamily="2" charset="0"/>
-                <a:ea typeface="Bodoni Ornaments" pitchFamily="2" charset="0"/>
-              </a:rPr>
-              <a:t>We find strength to face the day</a:t>
-            </a:r>
-          </a:p>
-          <a:p>
-            <a:endParaRPr lang="en-US" sz="4400" dirty="0">
+              <a:rPr lang="en-US" sz="5400" b="1" dirty="0">
+                <a:solidFill>
+                  <a:schemeClr val="bg1"/>
+                </a:solidFill>
+                <a:latin typeface="Avenir Medium" panose="02000503020000020003" pitchFamily="2" charset="0"/>
+                <a:ea typeface="Bodoni Ornaments" pitchFamily="2" charset="0"/>
+              </a:rPr>
+              <a:t>We find strength </a:t>
+            </a:r>
+          </a:p>
+          <a:p>
+            <a:r>
+              <a:rPr lang="en-US" sz="5400" b="1" dirty="0">
+                <a:solidFill>
+                  <a:schemeClr val="bg1"/>
+                </a:solidFill>
+                <a:latin typeface="Avenir Medium" panose="02000503020000020003" pitchFamily="2" charset="0"/>
+                <a:ea typeface="Bodoni Ornaments" pitchFamily="2" charset="0"/>
+              </a:rPr>
+              <a:t>to face the day</a:t>
+            </a:r>
+          </a:p>
+          <a:p>
+            <a:endParaRPr lang="en-US" sz="5400" b="1" dirty="0">
               <a:solidFill>
                 <a:schemeClr val="bg1"/>
               </a:solidFill>
@@ -3609,52 +4573,7 @@
             </a:endParaRPr>
           </a:p>
           <a:p>
-            <a:r>
-              <a:rPr lang="en-US" sz="4400" dirty="0">
-                <a:solidFill>
-                  <a:schemeClr val="bg1"/>
-                </a:solidFill>
-                <a:latin typeface="Avenir Medium" panose="02000503020000020003" pitchFamily="2" charset="0"/>
-                <a:ea typeface="Bodoni Ornaments" pitchFamily="2" charset="0"/>
-              </a:rPr>
-              <a:t>And in Your presence </a:t>
-            </a:r>
-          </a:p>
-          <a:p>
-            <a:r>
-              <a:rPr lang="en-US" sz="4400" dirty="0">
-                <a:solidFill>
-                  <a:schemeClr val="bg1"/>
-                </a:solidFill>
-                <a:latin typeface="Avenir Medium" panose="02000503020000020003" pitchFamily="2" charset="0"/>
-                <a:ea typeface="Bodoni Ornaments" pitchFamily="2" charset="0"/>
-              </a:rPr>
-              <a:t>All our fears are washed away</a:t>
-            </a:r>
-          </a:p>
-          <a:p>
-            <a:endParaRPr lang="en-US" sz="4400" dirty="0">
-              <a:solidFill>
-                <a:schemeClr val="bg1"/>
-              </a:solidFill>
-              <a:latin typeface="Avenir Medium" panose="02000503020000020003" pitchFamily="2" charset="0"/>
-              <a:ea typeface="Bodoni Ornaments" pitchFamily="2" charset="0"/>
-            </a:endParaRPr>
-          </a:p>
-          <a:p>
-            <a:r>
-              <a:rPr lang="en-US" sz="4400" dirty="0">
-                <a:solidFill>
-                  <a:schemeClr val="bg1"/>
-                </a:solidFill>
-                <a:latin typeface="Avenir Medium" panose="02000503020000020003" pitchFamily="2" charset="0"/>
-                <a:ea typeface="Bodoni Ornaments" pitchFamily="2" charset="0"/>
-              </a:rPr>
-              <a:t>washed  away</a:t>
-            </a:r>
-          </a:p>
-          <a:p>
-            <a:endParaRPr lang="en-US" sz="4400" dirty="0">
+            <a:endParaRPr lang="en-US" sz="5400" b="1" dirty="0">
               <a:solidFill>
                 <a:schemeClr val="bg1"/>
               </a:solidFill>
@@ -3677,7 +4596,143 @@
 </p:sld>
 </file>
 
-<file path=ppt/slides/slide4.xml><?xml version="1.0" encoding="utf-8"?>
+<file path=ppt/slides/slide5.xml><?xml version="1.0" encoding="utf-8"?>
+<p:sld xmlns:a="http://schemas.openxmlformats.org/drawingml/2006/main" xmlns:r="http://schemas.openxmlformats.org/officeDocument/2006/relationships" xmlns:p="http://schemas.openxmlformats.org/presentationml/2006/main">
+  <p:cSld>
+    <p:bg>
+      <p:bgPr>
+        <a:solidFill>
+          <a:schemeClr val="tx1"/>
+        </a:solidFill>
+        <a:effectLst/>
+      </p:bgPr>
+    </p:bg>
+    <p:spTree>
+      <p:nvGrpSpPr>
+        <p:cNvPr id="1" name="">
+          <a:extLst>
+            <a:ext uri="{FF2B5EF4-FFF2-40B4-BE49-F238E27FC236}">
+              <a16:creationId xmlns:a16="http://schemas.microsoft.com/office/drawing/2014/main" id="{3B6792E6-4C21-D2D6-B268-AF8CB127A2F6}"/>
+            </a:ext>
+          </a:extLst>
+        </p:cNvPr>
+        <p:cNvGrpSpPr/>
+        <p:nvPr/>
+      </p:nvGrpSpPr>
+      <p:grpSpPr>
+        <a:xfrm>
+          <a:off x="0" y="0"/>
+          <a:ext cx="0" cy="0"/>
+          <a:chOff x="0" y="0"/>
+          <a:chExt cx="0" cy="0"/>
+        </a:xfrm>
+      </p:grpSpPr>
+      <p:sp>
+        <p:nvSpPr>
+          <p:cNvPr id="3" name="Subtitle 2">
+            <a:extLst>
+              <a:ext uri="{FF2B5EF4-FFF2-40B4-BE49-F238E27FC236}">
+                <a16:creationId xmlns:a16="http://schemas.microsoft.com/office/drawing/2014/main" id="{C0DA119B-E019-1B0C-84F8-E8B6A0CF2D9D}"/>
+              </a:ext>
+            </a:extLst>
+          </p:cNvPr>
+          <p:cNvSpPr>
+            <a:spLocks noGrp="1"/>
+          </p:cNvSpPr>
+          <p:nvPr>
+            <p:ph type="subTitle" idx="1"/>
+          </p:nvPr>
+        </p:nvSpPr>
+        <p:spPr>
+          <a:xfrm>
+            <a:off x="84221" y="213360"/>
+            <a:ext cx="8891337" cy="6416040"/>
+          </a:xfrm>
+        </p:spPr>
+        <p:txBody>
+          <a:bodyPr>
+            <a:noAutofit/>
+          </a:bodyPr>
+          <a:lstStyle/>
+          <a:p>
+            <a:endParaRPr lang="en-US" sz="5400" b="1" dirty="0">
+              <a:solidFill>
+                <a:schemeClr val="bg1"/>
+              </a:solidFill>
+              <a:latin typeface="Avenir Medium" panose="02000503020000020003" pitchFamily="2" charset="0"/>
+              <a:ea typeface="Bodoni Ornaments" pitchFamily="2" charset="0"/>
+            </a:endParaRPr>
+          </a:p>
+          <a:p>
+            <a:r>
+              <a:rPr lang="en-US" sz="5400" b="1" dirty="0">
+                <a:solidFill>
+                  <a:schemeClr val="bg1"/>
+                </a:solidFill>
+                <a:latin typeface="Avenir Medium" panose="02000503020000020003" pitchFamily="2" charset="0"/>
+                <a:ea typeface="Bodoni Ornaments" pitchFamily="2" charset="0"/>
+              </a:rPr>
+              <a:t>And in Your presence </a:t>
+            </a:r>
+          </a:p>
+          <a:p>
+            <a:r>
+              <a:rPr lang="en-US" sz="5400" b="1" dirty="0">
+                <a:solidFill>
+                  <a:schemeClr val="bg1"/>
+                </a:solidFill>
+                <a:latin typeface="Avenir Medium" panose="02000503020000020003" pitchFamily="2" charset="0"/>
+                <a:ea typeface="Bodoni Ornaments" pitchFamily="2" charset="0"/>
+              </a:rPr>
+              <a:t>All our fears are washed away</a:t>
+            </a:r>
+          </a:p>
+          <a:p>
+            <a:endParaRPr lang="en-US" sz="5400" b="1" dirty="0">
+              <a:solidFill>
+                <a:schemeClr val="bg1"/>
+              </a:solidFill>
+              <a:latin typeface="Avenir Medium" panose="02000503020000020003" pitchFamily="2" charset="0"/>
+              <a:ea typeface="Bodoni Ornaments" pitchFamily="2" charset="0"/>
+            </a:endParaRPr>
+          </a:p>
+          <a:p>
+            <a:r>
+              <a:rPr lang="en-US" sz="5400" b="1" dirty="0">
+                <a:solidFill>
+                  <a:schemeClr val="bg1"/>
+                </a:solidFill>
+                <a:latin typeface="Avenir Medium" panose="02000503020000020003" pitchFamily="2" charset="0"/>
+                <a:ea typeface="Bodoni Ornaments" pitchFamily="2" charset="0"/>
+              </a:rPr>
+              <a:t>washed  away</a:t>
+            </a:r>
+          </a:p>
+          <a:p>
+            <a:endParaRPr lang="en-US" sz="5400" b="1" dirty="0">
+              <a:solidFill>
+                <a:schemeClr val="bg1"/>
+              </a:solidFill>
+              <a:latin typeface="Avenir Medium" panose="02000503020000020003" pitchFamily="2" charset="0"/>
+              <a:ea typeface="Bodoni Ornaments" pitchFamily="2" charset="0"/>
+            </a:endParaRPr>
+          </a:p>
+        </p:txBody>
+      </p:sp>
+    </p:spTree>
+    <p:extLst>
+      <p:ext uri="{BB962C8B-B14F-4D97-AF65-F5344CB8AC3E}">
+        <p14:creationId xmlns:p14="http://schemas.microsoft.com/office/powerpoint/2010/main" val="4182246750"/>
+      </p:ext>
+    </p:extLst>
+  </p:cSld>
+  <p:clrMapOvr>
+    <a:masterClrMapping/>
+  </p:clrMapOvr>
+</p:sld>
+</file>
+
+<file path=ppt/slides/slide6.xml><?xml version="1.0" encoding="utf-8"?>
 <p:sld xmlns:a="http://schemas.openxmlformats.org/drawingml/2006/main" xmlns:r="http://schemas.openxmlformats.org/officeDocument/2006/relationships" xmlns:p="http://schemas.openxmlformats.org/presentationml/2006/main">
   <p:cSld>
     <p:bg>
@@ -3736,7 +4791,7 @@
           </a:bodyPr>
           <a:lstStyle/>
           <a:p>
-            <a:endParaRPr lang="en-US" sz="4400" dirty="0">
+            <a:endParaRPr lang="en-US" sz="5400" b="1" dirty="0">
               <a:solidFill>
                 <a:schemeClr val="bg1"/>
               </a:solidFill>
@@ -3746,7 +4801,7 @@
           </a:p>
           <a:p>
             <a:r>
-              <a:rPr lang="en-US" sz="4400" dirty="0">
+              <a:rPr lang="en-US" sz="5400" b="1" dirty="0">
                 <a:solidFill>
                   <a:schemeClr val="bg1"/>
                 </a:solidFill>
@@ -3758,19 +4813,31 @@
           </a:p>
           <a:p>
             <a:r>
-              <a:rPr lang="en-US" sz="4400" dirty="0">
-                <a:solidFill>
-                  <a:schemeClr val="bg1"/>
-                </a:solidFill>
-                <a:latin typeface="Avenir Medium" panose="02000503020000020003" pitchFamily="2" charset="0"/>
-                <a:ea typeface="Bodoni Ornaments" pitchFamily="2" charset="0"/>
-              </a:rPr>
-              <a:t>You are the God who saves us, </a:t>
-            </a:r>
-          </a:p>
-          <a:p>
-            <a:r>
-              <a:rPr lang="en-US" sz="4400" dirty="0">
+              <a:rPr lang="en-US" sz="5400" b="1" dirty="0">
+                <a:solidFill>
+                  <a:schemeClr val="bg1"/>
+                </a:solidFill>
+                <a:latin typeface="Avenir Medium" panose="02000503020000020003" pitchFamily="2" charset="0"/>
+                <a:ea typeface="Bodoni Ornaments" pitchFamily="2" charset="0"/>
+              </a:rPr>
+              <a:t>You are the God </a:t>
+            </a:r>
+          </a:p>
+          <a:p>
+            <a:r>
+              <a:rPr lang="en-US" sz="5400" b="1" dirty="0">
+                <a:solidFill>
+                  <a:schemeClr val="bg1"/>
+                </a:solidFill>
+                <a:latin typeface="Avenir Medium" panose="02000503020000020003" pitchFamily="2" charset="0"/>
+                <a:ea typeface="Bodoni Ornaments" pitchFamily="2" charset="0"/>
+              </a:rPr>
+              <a:t>who saves us, </a:t>
+            </a:r>
+          </a:p>
+          <a:p>
+            <a:r>
+              <a:rPr lang="en-US" sz="5400" b="1" dirty="0">
                 <a:solidFill>
                   <a:schemeClr val="bg1"/>
                 </a:solidFill>
@@ -3781,7 +4848,7 @@
             </a:r>
           </a:p>
           <a:p>
-            <a:endParaRPr lang="en-US" sz="4400" dirty="0">
+            <a:endParaRPr lang="en-US" sz="5400" b="1" dirty="0">
               <a:solidFill>
                 <a:schemeClr val="bg1"/>
               </a:solidFill>
@@ -3804,7 +4871,7 @@
 </p:sld>
 </file>
 
-<file path=ppt/slides/slide5.xml><?xml version="1.0" encoding="utf-8"?>
+<file path=ppt/slides/slide7.xml><?xml version="1.0" encoding="utf-8"?>
 <p:sld xmlns:a="http://schemas.openxmlformats.org/drawingml/2006/main" xmlns:r="http://schemas.openxmlformats.org/officeDocument/2006/relationships" xmlns:p="http://schemas.openxmlformats.org/presentationml/2006/main">
   <p:cSld>
     <p:bg>
@@ -3863,7 +4930,7 @@
           </a:bodyPr>
           <a:lstStyle/>
           <a:p>
-            <a:endParaRPr lang="en-US" sz="4400" dirty="0">
+            <a:endParaRPr lang="en-US" sz="5400" b="1" dirty="0">
               <a:solidFill>
                 <a:schemeClr val="bg1"/>
               </a:solidFill>
@@ -3873,7 +4940,7 @@
           </a:p>
           <a:p>
             <a:r>
-              <a:rPr lang="en-US" sz="4400" dirty="0">
+              <a:rPr lang="en-US" sz="5400" b="1" dirty="0">
                 <a:solidFill>
                   <a:schemeClr val="bg1"/>
                 </a:solidFill>
@@ -3884,19 +4951,7 @@
             </a:r>
           </a:p>
           <a:p>
-            <a:r>
-              <a:rPr lang="en-US" sz="4400" dirty="0">
-                <a:solidFill>
-                  <a:schemeClr val="bg1"/>
-                </a:solidFill>
-                <a:latin typeface="Avenir Medium" panose="02000503020000020003" pitchFamily="2" charset="0"/>
-                <a:ea typeface="Bodoni Ornaments" pitchFamily="2" charset="0"/>
-              </a:rPr>
-              <a:t>We turn to You</a:t>
-            </a:r>
-          </a:p>
-          <a:p>
-            <a:endParaRPr lang="en-US" sz="4400" dirty="0">
+            <a:endParaRPr lang="en-US" sz="5400" b="1" dirty="0">
               <a:solidFill>
                 <a:schemeClr val="bg1"/>
               </a:solidFill>
@@ -3906,42 +4961,18 @@
           </a:p>
           <a:p>
             <a:r>
-              <a:rPr lang="en-US" sz="4400" dirty="0">
-                <a:solidFill>
-                  <a:schemeClr val="bg1"/>
-                </a:solidFill>
-                <a:latin typeface="Avenir Medium" panose="02000503020000020003" pitchFamily="2" charset="0"/>
-                <a:ea typeface="Bodoni Ornaments" pitchFamily="2" charset="0"/>
-              </a:rPr>
-              <a:t>In Your kingdom </a:t>
-            </a:r>
-          </a:p>
-          <a:p>
-            <a:r>
-              <a:rPr lang="en-US" sz="4400" dirty="0">
-                <a:solidFill>
-                  <a:schemeClr val="bg1"/>
-                </a:solidFill>
-                <a:latin typeface="Avenir Medium" panose="02000503020000020003" pitchFamily="2" charset="0"/>
-                <a:ea typeface="Bodoni Ornaments" pitchFamily="2" charset="0"/>
-              </a:rPr>
-              <a:t>broken lives are made new</a:t>
-            </a:r>
-          </a:p>
-          <a:p>
-            <a:r>
-              <a:rPr lang="en-US" sz="4400" dirty="0">
-                <a:solidFill>
-                  <a:schemeClr val="bg1"/>
-                </a:solidFill>
-                <a:latin typeface="Avenir Medium" panose="02000503020000020003" pitchFamily="2" charset="0"/>
-                <a:ea typeface="Bodoni Ornaments" pitchFamily="2" charset="0"/>
-              </a:rPr>
-              <a:t>You make us new</a:t>
-            </a:r>
-          </a:p>
-          <a:p>
-            <a:endParaRPr lang="en-US" sz="4400" dirty="0">
+              <a:rPr lang="en-US" sz="5400" b="1" dirty="0">
+                <a:solidFill>
+                  <a:schemeClr val="bg1"/>
+                </a:solidFill>
+                <a:latin typeface="Avenir Medium" panose="02000503020000020003" pitchFamily="2" charset="0"/>
+                <a:ea typeface="Bodoni Ornaments" pitchFamily="2" charset="0"/>
+              </a:rPr>
+              <a:t>We turn to You</a:t>
+            </a:r>
+          </a:p>
+          <a:p>
+            <a:endParaRPr lang="en-US" sz="5400" b="1" dirty="0">
               <a:solidFill>
                 <a:schemeClr val="bg1"/>
               </a:solidFill>
@@ -3949,81 +4980,8 @@
               <a:ea typeface="Bodoni Ornaments" pitchFamily="2" charset="0"/>
             </a:endParaRPr>
           </a:p>
-        </p:txBody>
-      </p:sp>
-    </p:spTree>
-    <p:extLst>
-      <p:ext uri="{BB962C8B-B14F-4D97-AF65-F5344CB8AC3E}">
-        <p14:creationId xmlns:p14="http://schemas.microsoft.com/office/powerpoint/2010/main" val="1296284870"/>
-      </p:ext>
-    </p:extLst>
-  </p:cSld>
-  <p:clrMapOvr>
-    <a:masterClrMapping/>
-  </p:clrMapOvr>
-</p:sld>
-</file>
-
-<file path=ppt/slides/slide6.xml><?xml version="1.0" encoding="utf-8"?>
-<p:sld xmlns:a="http://schemas.openxmlformats.org/drawingml/2006/main" xmlns:r="http://schemas.openxmlformats.org/officeDocument/2006/relationships" xmlns:p="http://schemas.openxmlformats.org/presentationml/2006/main">
-  <p:cSld>
-    <p:bg>
-      <p:bgPr>
-        <a:solidFill>
-          <a:schemeClr val="tx1"/>
-        </a:solidFill>
-        <a:effectLst/>
-      </p:bgPr>
-    </p:bg>
-    <p:spTree>
-      <p:nvGrpSpPr>
-        <p:cNvPr id="1" name="">
-          <a:extLst>
-            <a:ext uri="{FF2B5EF4-FFF2-40B4-BE49-F238E27FC236}">
-              <a16:creationId xmlns:a16="http://schemas.microsoft.com/office/drawing/2014/main" id="{713DB330-69C0-F8C4-2AD6-2E652A266E71}"/>
-            </a:ext>
-          </a:extLst>
-        </p:cNvPr>
-        <p:cNvGrpSpPr/>
-        <p:nvPr/>
-      </p:nvGrpSpPr>
-      <p:grpSpPr>
-        <a:xfrm>
-          <a:off x="0" y="0"/>
-          <a:ext cx="0" cy="0"/>
-          <a:chOff x="0" y="0"/>
-          <a:chExt cx="0" cy="0"/>
-        </a:xfrm>
-      </p:grpSpPr>
-      <p:sp>
-        <p:nvSpPr>
-          <p:cNvPr id="3" name="Subtitle 2">
-            <a:extLst>
-              <a:ext uri="{FF2B5EF4-FFF2-40B4-BE49-F238E27FC236}">
-                <a16:creationId xmlns:a16="http://schemas.microsoft.com/office/drawing/2014/main" id="{D3D63B76-9566-6117-076E-3F797355E8D1}"/>
-              </a:ext>
-            </a:extLst>
-          </p:cNvPr>
-          <p:cNvSpPr>
-            <a:spLocks noGrp="1"/>
-          </p:cNvSpPr>
-          <p:nvPr>
-            <p:ph type="subTitle" idx="1"/>
-          </p:nvPr>
-        </p:nvSpPr>
-        <p:spPr>
-          <a:xfrm>
-            <a:off x="84221" y="213360"/>
-            <a:ext cx="8891337" cy="6416040"/>
-          </a:xfrm>
-        </p:spPr>
-        <p:txBody>
-          <a:bodyPr>
-            <a:noAutofit/>
-          </a:bodyPr>
-          <a:lstStyle/>
-          <a:p>
-            <a:endParaRPr lang="en-US" sz="4400" dirty="0">
+          <a:p>
+            <a:endParaRPr lang="en-US" sz="5400" b="1" dirty="0">
               <a:solidFill>
                 <a:schemeClr val="bg1"/>
               </a:solidFill>
@@ -4031,236 +4989,12 @@
               <a:ea typeface="Bodoni Ornaments" pitchFamily="2" charset="0"/>
             </a:endParaRPr>
           </a:p>
-          <a:p>
-            <a:r>
-              <a:rPr lang="en-US" sz="4400" dirty="0" err="1">
-                <a:solidFill>
-                  <a:schemeClr val="bg1"/>
-                </a:solidFill>
-                <a:latin typeface="Avenir Medium" panose="02000503020000020003" pitchFamily="2" charset="0"/>
-                <a:ea typeface="Bodoni Ornaments" pitchFamily="2" charset="0"/>
-              </a:rPr>
-              <a:t>'Cause</a:t>
-            </a:r>
-            <a:r>
-              <a:rPr lang="en-US" sz="4400" dirty="0">
-                <a:solidFill>
-                  <a:schemeClr val="bg1"/>
-                </a:solidFill>
-                <a:latin typeface="Avenir Medium" panose="02000503020000020003" pitchFamily="2" charset="0"/>
-                <a:ea typeface="Bodoni Ornaments" pitchFamily="2" charset="0"/>
-              </a:rPr>
-              <a:t> when we see You</a:t>
-            </a:r>
-          </a:p>
-          <a:p>
-            <a:r>
-              <a:rPr lang="en-US" sz="4400" dirty="0">
-                <a:solidFill>
-                  <a:schemeClr val="bg1"/>
-                </a:solidFill>
-                <a:latin typeface="Avenir Medium" panose="02000503020000020003" pitchFamily="2" charset="0"/>
-                <a:ea typeface="Bodoni Ornaments" pitchFamily="2" charset="0"/>
-              </a:rPr>
-              <a:t>We find strength to face the day</a:t>
-            </a:r>
-          </a:p>
-          <a:p>
-            <a:endParaRPr lang="en-US" sz="4400" dirty="0">
-              <a:solidFill>
-                <a:schemeClr val="bg1"/>
-              </a:solidFill>
-              <a:latin typeface="Avenir Medium" panose="02000503020000020003" pitchFamily="2" charset="0"/>
-              <a:ea typeface="Bodoni Ornaments" pitchFamily="2" charset="0"/>
-            </a:endParaRPr>
-          </a:p>
-          <a:p>
-            <a:r>
-              <a:rPr lang="en-US" sz="4400" dirty="0">
-                <a:solidFill>
-                  <a:schemeClr val="bg1"/>
-                </a:solidFill>
-                <a:latin typeface="Avenir Medium" panose="02000503020000020003" pitchFamily="2" charset="0"/>
-                <a:ea typeface="Bodoni Ornaments" pitchFamily="2" charset="0"/>
-              </a:rPr>
-              <a:t>And in Your presence </a:t>
-            </a:r>
-          </a:p>
-          <a:p>
-            <a:r>
-              <a:rPr lang="en-US" sz="4400" dirty="0">
-                <a:solidFill>
-                  <a:schemeClr val="bg1"/>
-                </a:solidFill>
-                <a:latin typeface="Avenir Medium" panose="02000503020000020003" pitchFamily="2" charset="0"/>
-                <a:ea typeface="Bodoni Ornaments" pitchFamily="2" charset="0"/>
-              </a:rPr>
-              <a:t>All our fears are washed away</a:t>
-            </a:r>
-          </a:p>
-          <a:p>
-            <a:endParaRPr lang="en-US" sz="4400" dirty="0">
-              <a:solidFill>
-                <a:schemeClr val="bg1"/>
-              </a:solidFill>
-              <a:latin typeface="Avenir Medium" panose="02000503020000020003" pitchFamily="2" charset="0"/>
-              <a:ea typeface="Bodoni Ornaments" pitchFamily="2" charset="0"/>
-            </a:endParaRPr>
-          </a:p>
-          <a:p>
-            <a:r>
-              <a:rPr lang="en-US" sz="4400" dirty="0">
-                <a:solidFill>
-                  <a:schemeClr val="bg1"/>
-                </a:solidFill>
-                <a:latin typeface="Avenir Medium" panose="02000503020000020003" pitchFamily="2" charset="0"/>
-                <a:ea typeface="Bodoni Ornaments" pitchFamily="2" charset="0"/>
-              </a:rPr>
-              <a:t>washed  away</a:t>
-            </a:r>
-          </a:p>
-          <a:p>
-            <a:endParaRPr lang="en-US" sz="4400" dirty="0">
-              <a:solidFill>
-                <a:schemeClr val="bg1"/>
-              </a:solidFill>
-              <a:latin typeface="Avenir Medium" panose="02000503020000020003" pitchFamily="2" charset="0"/>
-              <a:ea typeface="Bodoni Ornaments" pitchFamily="2" charset="0"/>
-            </a:endParaRPr>
-          </a:p>
         </p:txBody>
       </p:sp>
     </p:spTree>
     <p:extLst>
       <p:ext uri="{BB962C8B-B14F-4D97-AF65-F5344CB8AC3E}">
-        <p14:creationId xmlns:p14="http://schemas.microsoft.com/office/powerpoint/2010/main" val="4231512143"/>
-      </p:ext>
-    </p:extLst>
-  </p:cSld>
-  <p:clrMapOvr>
-    <a:masterClrMapping/>
-  </p:clrMapOvr>
-</p:sld>
-</file>
-
-<file path=ppt/slides/slide7.xml><?xml version="1.0" encoding="utf-8"?>
-<p:sld xmlns:a="http://schemas.openxmlformats.org/drawingml/2006/main" xmlns:r="http://schemas.openxmlformats.org/officeDocument/2006/relationships" xmlns:p="http://schemas.openxmlformats.org/presentationml/2006/main">
-  <p:cSld>
-    <p:bg>
-      <p:bgPr>
-        <a:solidFill>
-          <a:schemeClr val="tx1"/>
-        </a:solidFill>
-        <a:effectLst/>
-      </p:bgPr>
-    </p:bg>
-    <p:spTree>
-      <p:nvGrpSpPr>
-        <p:cNvPr id="1" name="">
-          <a:extLst>
-            <a:ext uri="{FF2B5EF4-FFF2-40B4-BE49-F238E27FC236}">
-              <a16:creationId xmlns:a16="http://schemas.microsoft.com/office/drawing/2014/main" id="{81FC1D1E-D2AC-A969-8263-1E9AFF49338C}"/>
-            </a:ext>
-          </a:extLst>
-        </p:cNvPr>
-        <p:cNvGrpSpPr/>
-        <p:nvPr/>
-      </p:nvGrpSpPr>
-      <p:grpSpPr>
-        <a:xfrm>
-          <a:off x="0" y="0"/>
-          <a:ext cx="0" cy="0"/>
-          <a:chOff x="0" y="0"/>
-          <a:chExt cx="0" cy="0"/>
-        </a:xfrm>
-      </p:grpSpPr>
-      <p:sp>
-        <p:nvSpPr>
-          <p:cNvPr id="3" name="Subtitle 2">
-            <a:extLst>
-              <a:ext uri="{FF2B5EF4-FFF2-40B4-BE49-F238E27FC236}">
-                <a16:creationId xmlns:a16="http://schemas.microsoft.com/office/drawing/2014/main" id="{60132B37-FB96-07FF-5093-4D838E543372}"/>
-              </a:ext>
-            </a:extLst>
-          </p:cNvPr>
-          <p:cNvSpPr>
-            <a:spLocks noGrp="1"/>
-          </p:cNvSpPr>
-          <p:nvPr>
-            <p:ph type="subTitle" idx="1"/>
-          </p:nvPr>
-        </p:nvSpPr>
-        <p:spPr>
-          <a:xfrm>
-            <a:off x="144379" y="228600"/>
-            <a:ext cx="8903369" cy="6431280"/>
-          </a:xfrm>
-        </p:spPr>
-        <p:txBody>
-          <a:bodyPr>
-            <a:noAutofit/>
-          </a:bodyPr>
-          <a:lstStyle/>
-          <a:p>
-            <a:endParaRPr lang="en-US" sz="4400" dirty="0">
-              <a:solidFill>
-                <a:schemeClr val="bg1"/>
-              </a:solidFill>
-              <a:latin typeface="Avenir Medium" panose="02000503020000020003" pitchFamily="2" charset="0"/>
-              <a:ea typeface="Bodoni Ornaments" pitchFamily="2" charset="0"/>
-            </a:endParaRPr>
-          </a:p>
-          <a:p>
-            <a:r>
-              <a:rPr lang="en-US" sz="4400" dirty="0">
-                <a:solidFill>
-                  <a:schemeClr val="bg1"/>
-                </a:solidFill>
-                <a:latin typeface="Avenir Medium" panose="02000503020000020003" pitchFamily="2" charset="0"/>
-                <a:ea typeface="Bodoni Ornaments" pitchFamily="2" charset="0"/>
-              </a:rPr>
-              <a:t>Hosanna, hosanna </a:t>
-            </a:r>
-          </a:p>
-          <a:p>
-            <a:r>
-              <a:rPr lang="en-US" sz="4400" dirty="0">
-                <a:solidFill>
-                  <a:schemeClr val="bg1"/>
-                </a:solidFill>
-                <a:latin typeface="Avenir Medium" panose="02000503020000020003" pitchFamily="2" charset="0"/>
-                <a:ea typeface="Bodoni Ornaments" pitchFamily="2" charset="0"/>
-              </a:rPr>
-              <a:t>You are the God who saves us, </a:t>
-            </a:r>
-          </a:p>
-          <a:p>
-            <a:r>
-              <a:rPr lang="en-US" sz="4400" dirty="0">
-                <a:solidFill>
-                  <a:schemeClr val="bg1"/>
-                </a:solidFill>
-                <a:latin typeface="Avenir Medium" panose="02000503020000020003" pitchFamily="2" charset="0"/>
-                <a:ea typeface="Bodoni Ornaments" pitchFamily="2" charset="0"/>
-              </a:rPr>
-              <a:t>worthy of all our praises</a:t>
-            </a:r>
-          </a:p>
-          <a:p>
-            <a:endParaRPr lang="en-US" sz="4400" dirty="0">
-              <a:solidFill>
-                <a:schemeClr val="bg1"/>
-              </a:solidFill>
-              <a:latin typeface="Avenir Medium" panose="02000503020000020003" pitchFamily="2" charset="0"/>
-              <a:ea typeface="Bodoni Ornaments" pitchFamily="2" charset="0"/>
-            </a:endParaRPr>
-          </a:p>
-        </p:txBody>
-      </p:sp>
-    </p:spTree>
-    <p:extLst>
-      <p:ext uri="{BB962C8B-B14F-4D97-AF65-F5344CB8AC3E}">
-        <p14:creationId xmlns:p14="http://schemas.microsoft.com/office/powerpoint/2010/main" val="245486826"/>
+        <p14:creationId xmlns:p14="http://schemas.microsoft.com/office/powerpoint/2010/main" val="1296284870"/>
       </p:ext>
     </p:extLst>
   </p:cSld>
@@ -4286,7 +5020,7 @@
         <p:cNvPr id="1" name="">
           <a:extLst>
             <a:ext uri="{FF2B5EF4-FFF2-40B4-BE49-F238E27FC236}">
-              <a16:creationId xmlns:a16="http://schemas.microsoft.com/office/drawing/2014/main" id="{B6BA87F3-30A5-3C5A-BA70-70E1CE69C9F4}"/>
+              <a16:creationId xmlns:a16="http://schemas.microsoft.com/office/drawing/2014/main" id="{5042E848-3726-1937-FD67-6C46C53A34D3}"/>
             </a:ext>
           </a:extLst>
         </p:cNvPr>
@@ -4306,7 +5040,7 @@
           <p:cNvPr id="3" name="Subtitle 2">
             <a:extLst>
               <a:ext uri="{FF2B5EF4-FFF2-40B4-BE49-F238E27FC236}">
-                <a16:creationId xmlns:a16="http://schemas.microsoft.com/office/drawing/2014/main" id="{7BED1C2F-387A-D854-55D9-02E9DC03BA98}"/>
+                <a16:creationId xmlns:a16="http://schemas.microsoft.com/office/drawing/2014/main" id="{2FB7CA7A-27E0-9F28-0CE7-7AA5B2DAE08E}"/>
               </a:ext>
             </a:extLst>
           </p:cNvPr>
@@ -4329,7 +5063,7 @@
           </a:bodyPr>
           <a:lstStyle/>
           <a:p>
-            <a:endParaRPr lang="en-US" sz="4400" dirty="0">
+            <a:endParaRPr lang="en-US" sz="5400" b="1" dirty="0">
               <a:solidFill>
                 <a:schemeClr val="bg1"/>
               </a:solidFill>
@@ -4339,42 +5073,30 @@
           </a:p>
           <a:p>
             <a:r>
-              <a:rPr lang="en-US" sz="4400" dirty="0">
-                <a:solidFill>
-                  <a:schemeClr val="bg1"/>
-                </a:solidFill>
-                <a:latin typeface="Avenir Medium" panose="02000503020000020003" pitchFamily="2" charset="0"/>
-                <a:ea typeface="Bodoni Ornaments" pitchFamily="2" charset="0"/>
-              </a:rPr>
-              <a:t>Hosanna, hosanna </a:t>
-            </a:r>
-          </a:p>
-          <a:p>
-            <a:r>
-              <a:rPr lang="en-US" sz="4400" dirty="0">
-                <a:solidFill>
-                  <a:schemeClr val="bg1"/>
-                </a:solidFill>
-                <a:latin typeface="Avenir Medium" panose="02000503020000020003" pitchFamily="2" charset="0"/>
-                <a:ea typeface="Bodoni Ornaments" pitchFamily="2" charset="0"/>
-              </a:rPr>
-              <a:t>Come have Your way among us</a:t>
-            </a:r>
-          </a:p>
-          <a:p>
-            <a:r>
-              <a:rPr lang="en-US" sz="4400" dirty="0">
-                <a:solidFill>
-                  <a:schemeClr val="bg1"/>
-                </a:solidFill>
-                <a:latin typeface="Avenir Medium" panose="02000503020000020003" pitchFamily="2" charset="0"/>
-                <a:ea typeface="Bodoni Ornaments" pitchFamily="2" charset="0"/>
-              </a:rPr>
-              <a:t>We welcome You here Lord Jesus</a:t>
-            </a:r>
-          </a:p>
-          <a:p>
-            <a:endParaRPr lang="en-US" sz="4400" dirty="0">
+              <a:rPr lang="en-US" sz="5400" b="1" dirty="0">
+                <a:solidFill>
+                  <a:schemeClr val="bg1"/>
+                </a:solidFill>
+                <a:latin typeface="Avenir Medium" panose="02000503020000020003" pitchFamily="2" charset="0"/>
+                <a:ea typeface="Bodoni Ornaments" pitchFamily="2" charset="0"/>
+              </a:rPr>
+              <a:t>In Your kingdom </a:t>
+            </a:r>
+          </a:p>
+          <a:p>
+            <a:r>
+              <a:rPr lang="en-US" sz="5400" b="1" dirty="0">
+                <a:solidFill>
+                  <a:schemeClr val="bg1"/>
+                </a:solidFill>
+                <a:latin typeface="Avenir Medium" panose="02000503020000020003" pitchFamily="2" charset="0"/>
+                <a:ea typeface="Bodoni Ornaments" pitchFamily="2" charset="0"/>
+              </a:rPr>
+              <a:t>broken lives are made new</a:t>
+            </a:r>
+          </a:p>
+          <a:p>
+            <a:endParaRPr lang="en-US" sz="5400" b="1" dirty="0">
               <a:solidFill>
                 <a:schemeClr val="bg1"/>
               </a:solidFill>
@@ -4382,12 +5104,33 @@
               <a:ea typeface="Bodoni Ornaments" pitchFamily="2" charset="0"/>
             </a:endParaRPr>
           </a:p>
+          <a:p>
+            <a:r>
+              <a:rPr lang="en-US" sz="5400" b="1" dirty="0">
+                <a:solidFill>
+                  <a:schemeClr val="bg1"/>
+                </a:solidFill>
+                <a:latin typeface="Avenir Medium" panose="02000503020000020003" pitchFamily="2" charset="0"/>
+                <a:ea typeface="Bodoni Ornaments" pitchFamily="2" charset="0"/>
+              </a:rPr>
+              <a:t>You make us new</a:t>
+            </a:r>
+          </a:p>
+          <a:p>
+            <a:endParaRPr lang="en-US" sz="5400" b="1" dirty="0">
+              <a:solidFill>
+                <a:schemeClr val="bg1"/>
+              </a:solidFill>
+              <a:latin typeface="Avenir Medium" panose="02000503020000020003" pitchFamily="2" charset="0"/>
+              <a:ea typeface="Bodoni Ornaments" pitchFamily="2" charset="0"/>
+            </a:endParaRPr>
+          </a:p>
         </p:txBody>
       </p:sp>
     </p:spTree>
     <p:extLst>
       <p:ext uri="{BB962C8B-B14F-4D97-AF65-F5344CB8AC3E}">
-        <p14:creationId xmlns:p14="http://schemas.microsoft.com/office/powerpoint/2010/main" val="1727555208"/>
+        <p14:creationId xmlns:p14="http://schemas.microsoft.com/office/powerpoint/2010/main" val="3933498333"/>
       </p:ext>
     </p:extLst>
   </p:cSld>
@@ -4413,7 +5156,7 @@
         <p:cNvPr id="1" name="">
           <a:extLst>
             <a:ext uri="{FF2B5EF4-FFF2-40B4-BE49-F238E27FC236}">
-              <a16:creationId xmlns:a16="http://schemas.microsoft.com/office/drawing/2014/main" id="{7E3BEC44-AF96-649C-C128-56006F24AB48}"/>
+              <a16:creationId xmlns:a16="http://schemas.microsoft.com/office/drawing/2014/main" id="{1ACE3B7E-6A4C-4B3D-3B04-373AC3904386}"/>
             </a:ext>
           </a:extLst>
         </p:cNvPr>
@@ -4433,7 +5176,7 @@
           <p:cNvPr id="3" name="Subtitle 2">
             <a:extLst>
               <a:ext uri="{FF2B5EF4-FFF2-40B4-BE49-F238E27FC236}">
-                <a16:creationId xmlns:a16="http://schemas.microsoft.com/office/drawing/2014/main" id="{CD8133E0-45F6-CA4C-CA19-1FA575A519A8}"/>
+                <a16:creationId xmlns:a16="http://schemas.microsoft.com/office/drawing/2014/main" id="{7070656A-99E5-DC2B-B1AA-76D635E1E90F}"/>
               </a:ext>
             </a:extLst>
           </p:cNvPr>
@@ -4456,7 +5199,7 @@
           </a:bodyPr>
           <a:lstStyle/>
           <a:p>
-            <a:endParaRPr lang="en-US" sz="4400" dirty="0">
+            <a:endParaRPr lang="en-US" sz="5400" b="1" dirty="0">
               <a:solidFill>
                 <a:schemeClr val="bg1"/>
               </a:solidFill>
@@ -4466,7 +5209,7 @@
           </a:p>
           <a:p>
             <a:r>
-              <a:rPr lang="en-US" sz="4400" dirty="0" err="1">
+              <a:rPr lang="en-US" sz="5400" b="1" dirty="0" err="1">
                 <a:solidFill>
                   <a:schemeClr val="bg1"/>
                 </a:solidFill>
@@ -4476,7 +5219,7 @@
               <a:t>'Cause</a:t>
             </a:r>
             <a:r>
-              <a:rPr lang="en-US" sz="4400" dirty="0">
+              <a:rPr lang="en-US" sz="5400" b="1" dirty="0">
                 <a:solidFill>
                   <a:schemeClr val="bg1"/>
                 </a:solidFill>
@@ -4488,18 +5231,30 @@
           </a:p>
           <a:p>
             <a:r>
-              <a:rPr lang="en-US" sz="4400" dirty="0">
-                <a:solidFill>
-                  <a:schemeClr val="bg1"/>
-                </a:solidFill>
-                <a:latin typeface="Avenir Medium" panose="02000503020000020003" pitchFamily="2" charset="0"/>
-                <a:ea typeface="Bodoni Ornaments" pitchFamily="2" charset="0"/>
-              </a:rPr>
-              <a:t>We find strength to face the day</a:t>
-            </a:r>
-          </a:p>
-          <a:p>
-            <a:endParaRPr lang="en-US" sz="4400" dirty="0">
+              <a:rPr lang="en-US" sz="5400" b="1" dirty="0">
+                <a:solidFill>
+                  <a:schemeClr val="bg1"/>
+                </a:solidFill>
+                <a:latin typeface="Avenir Medium" panose="02000503020000020003" pitchFamily="2" charset="0"/>
+                <a:ea typeface="Bodoni Ornaments" pitchFamily="2" charset="0"/>
+              </a:rPr>
+              <a:t>We find strength </a:t>
+            </a:r>
+          </a:p>
+          <a:p>
+            <a:r>
+              <a:rPr lang="en-US" sz="5400" b="1" dirty="0">
+                <a:solidFill>
+                  <a:schemeClr val="bg1"/>
+                </a:solidFill>
+                <a:latin typeface="Avenir Medium" panose="02000503020000020003" pitchFamily="2" charset="0"/>
+                <a:ea typeface="Bodoni Ornaments" pitchFamily="2" charset="0"/>
+              </a:rPr>
+              <a:t>to face the day</a:t>
+            </a:r>
+          </a:p>
+          <a:p>
+            <a:endParaRPr lang="en-US" sz="5400" b="1" dirty="0">
               <a:solidFill>
                 <a:schemeClr val="bg1"/>
               </a:solidFill>
@@ -4508,31 +5263,7 @@
             </a:endParaRPr>
           </a:p>
           <a:p>
-            <a:r>
-              <a:rPr lang="en-US" sz="4400" dirty="0">
-                <a:solidFill>
-                  <a:schemeClr val="bg1"/>
-                </a:solidFill>
-                <a:latin typeface="Avenir Medium" panose="02000503020000020003" pitchFamily="2" charset="0"/>
-                <a:ea typeface="Bodoni Ornaments" pitchFamily="2" charset="0"/>
-              </a:rPr>
-              <a:t>And in Your presence </a:t>
-            </a:r>
-          </a:p>
-          <a:p>
-            <a:r>
-              <a:rPr lang="en-US" sz="4400" dirty="0">
-                <a:solidFill>
-                  <a:schemeClr val="bg1"/>
-                </a:solidFill>
-                <a:latin typeface="Avenir Medium" panose="02000503020000020003" pitchFamily="2" charset="0"/>
-                <a:ea typeface="Bodoni Ornaments" pitchFamily="2" charset="0"/>
-              </a:rPr>
-              <a:t>All our fears are washed away</a:t>
-            </a:r>
-          </a:p>
-          <a:p>
-            <a:endParaRPr lang="en-US" sz="4400" dirty="0">
+            <a:endParaRPr lang="en-US" sz="5400" b="1" dirty="0">
               <a:solidFill>
                 <a:schemeClr val="bg1"/>
               </a:solidFill>
@@ -4540,33 +5271,12 @@
               <a:ea typeface="Bodoni Ornaments" pitchFamily="2" charset="0"/>
             </a:endParaRPr>
           </a:p>
-          <a:p>
-            <a:r>
-              <a:rPr lang="en-US" sz="4400" dirty="0">
-                <a:solidFill>
-                  <a:schemeClr val="bg1"/>
-                </a:solidFill>
-                <a:latin typeface="Avenir Medium" panose="02000503020000020003" pitchFamily="2" charset="0"/>
-                <a:ea typeface="Bodoni Ornaments" pitchFamily="2" charset="0"/>
-              </a:rPr>
-              <a:t>washed  away</a:t>
-            </a:r>
-          </a:p>
-          <a:p>
-            <a:endParaRPr lang="en-US" sz="4400" dirty="0">
-              <a:solidFill>
-                <a:schemeClr val="bg1"/>
-              </a:solidFill>
-              <a:latin typeface="Avenir Medium" panose="02000503020000020003" pitchFamily="2" charset="0"/>
-              <a:ea typeface="Bodoni Ornaments" pitchFamily="2" charset="0"/>
-            </a:endParaRPr>
-          </a:p>
         </p:txBody>
       </p:sp>
     </p:spTree>
     <p:extLst>
       <p:ext uri="{BB962C8B-B14F-4D97-AF65-F5344CB8AC3E}">
-        <p14:creationId xmlns:p14="http://schemas.microsoft.com/office/powerpoint/2010/main" val="1072379957"/>
+        <p14:creationId xmlns:p14="http://schemas.microsoft.com/office/powerpoint/2010/main" val="2309639426"/>
       </p:ext>
     </p:extLst>
   </p:cSld>

--- a/Hosanna (Praise is Rising).pptx
+++ b/Hosanna (Praise is Rising).pptx
@@ -3092,7 +3092,7 @@
                   <a:schemeClr val="bg1"/>
                 </a:solidFill>
               </a:rPr>
-              <a:t>Authors(Brenton Brown, Paul Baloch)</a:t>
+              <a:t>Words and Music by Brenton Brown &amp; Paul Baloch</a:t>
             </a:r>
           </a:p>
           <a:p>
